--- a/slides for class/my slides/Loops.pptx
+++ b/slides for class/my slides/Loops.pptx
@@ -9,9 +9,22 @@
     <p:sldId id="257" r:id="rId3"/>
     <p:sldId id="258" r:id="rId4"/>
     <p:sldId id="259" r:id="rId5"/>
-    <p:sldId id="260" r:id="rId6"/>
-    <p:sldId id="261" r:id="rId7"/>
-    <p:sldId id="262" r:id="rId8"/>
+    <p:sldId id="263" r:id="rId6"/>
+    <p:sldId id="260" r:id="rId7"/>
+    <p:sldId id="265" r:id="rId8"/>
+    <p:sldId id="262" r:id="rId9"/>
+    <p:sldId id="266" r:id="rId10"/>
+    <p:sldId id="267" r:id="rId11"/>
+    <p:sldId id="269" r:id="rId12"/>
+    <p:sldId id="270" r:id="rId13"/>
+    <p:sldId id="271" r:id="rId14"/>
+    <p:sldId id="272" r:id="rId15"/>
+    <p:sldId id="273" r:id="rId16"/>
+    <p:sldId id="274" r:id="rId17"/>
+    <p:sldId id="275" r:id="rId18"/>
+    <p:sldId id="276" r:id="rId19"/>
+    <p:sldId id="277" r:id="rId20"/>
+    <p:sldId id="278" r:id="rId21"/>
   </p:sldIdLst>
   <p:sldSz cx="12192000" cy="6858000"/>
   <p:notesSz cx="6858000" cy="9144000"/>
@@ -118,7 +131,7 @@
             <a:srgbClr val="A4A3A4"/>
           </p15:clr>
         </p15:guide>
-        <p15:guide id="2" pos="3840" userDrawn="1">
+        <p15:guide id="2" pos="3888" userDrawn="1">
           <p15:clr>
             <a:srgbClr val="A4A3A4"/>
           </p15:clr>
@@ -359,7 +372,7 @@
             <a:fld id="{B61BEF0D-F0BB-DE4B-95CE-6DB70DBA9567}" type="datetimeFigureOut">
               <a:rPr lang="en-US" dirty="0"/>
               <a:pPr/>
-              <a:t>6/1/25</a:t>
+              <a:t>7/24/25</a:t>
             </a:fld>
             <a:endParaRPr lang="en-US" dirty="0"/>
           </a:p>
@@ -690,7 +703,7 @@
             <a:fld id="{B61BEF0D-F0BB-DE4B-95CE-6DB70DBA9567}" type="datetimeFigureOut">
               <a:rPr lang="en-US" dirty="0"/>
               <a:pPr/>
-              <a:t>6/1/25</a:t>
+              <a:t>7/24/25</a:t>
             </a:fld>
             <a:endParaRPr lang="en-US" dirty="0"/>
           </a:p>
@@ -965,7 +978,7 @@
             <a:fld id="{B61BEF0D-F0BB-DE4B-95CE-6DB70DBA9567}" type="datetimeFigureOut">
               <a:rPr lang="en-US" dirty="0"/>
               <a:pPr/>
-              <a:t>6/1/25</a:t>
+              <a:t>7/24/25</a:t>
             </a:fld>
             <a:endParaRPr lang="en-US" dirty="0"/>
           </a:p>
@@ -1530,7 +1543,7 @@
             <a:fld id="{B61BEF0D-F0BB-DE4B-95CE-6DB70DBA9567}" type="datetimeFigureOut">
               <a:rPr lang="en-US" dirty="0"/>
               <a:pPr/>
-              <a:t>6/1/25</a:t>
+              <a:t>7/24/25</a:t>
             </a:fld>
             <a:endParaRPr lang="en-US" dirty="0"/>
           </a:p>
@@ -1805,7 +1818,7 @@
             <a:fld id="{B61BEF0D-F0BB-DE4B-95CE-6DB70DBA9567}" type="datetimeFigureOut">
               <a:rPr lang="en-US" dirty="0"/>
               <a:pPr/>
-              <a:t>6/1/25</a:t>
+              <a:t>7/24/25</a:t>
             </a:fld>
             <a:endParaRPr lang="en-US" dirty="0"/>
           </a:p>
@@ -2364,7 +2377,7 @@
             <a:fld id="{B61BEF0D-F0BB-DE4B-95CE-6DB70DBA9567}" type="datetimeFigureOut">
               <a:rPr lang="en-US" dirty="0"/>
               <a:pPr/>
-              <a:t>6/1/25</a:t>
+              <a:t>7/24/25</a:t>
             </a:fld>
             <a:endParaRPr lang="en-US" dirty="0"/>
           </a:p>
@@ -2688,7 +2701,7 @@
             <a:fld id="{B61BEF0D-F0BB-DE4B-95CE-6DB70DBA9567}" type="datetimeFigureOut">
               <a:rPr lang="en-US" dirty="0"/>
               <a:pPr/>
-              <a:t>6/1/25</a:t>
+              <a:t>7/24/25</a:t>
             </a:fld>
             <a:endParaRPr lang="en-US" dirty="0"/>
           </a:p>
@@ -2862,7 +2875,7 @@
             <a:fld id="{B61BEF0D-F0BB-DE4B-95CE-6DB70DBA9567}" type="datetimeFigureOut">
               <a:rPr lang="en-US" dirty="0"/>
               <a:pPr/>
-              <a:t>6/1/25</a:t>
+              <a:t>7/24/25</a:t>
             </a:fld>
             <a:endParaRPr lang="en-US" dirty="0"/>
           </a:p>
@@ -3097,7 +3110,7 @@
             <a:fld id="{B61BEF0D-F0BB-DE4B-95CE-6DB70DBA9567}" type="datetimeFigureOut">
               <a:rPr lang="en-US" dirty="0"/>
               <a:pPr/>
-              <a:t>6/1/25</a:t>
+              <a:t>7/24/25</a:t>
             </a:fld>
             <a:endParaRPr lang="en-US" dirty="0"/>
           </a:p>
@@ -3294,7 +3307,7 @@
             <a:fld id="{B61BEF0D-F0BB-DE4B-95CE-6DB70DBA9567}" type="datetimeFigureOut">
               <a:rPr lang="en-US" dirty="0"/>
               <a:pPr/>
-              <a:t>6/1/25</a:t>
+              <a:t>7/24/25</a:t>
             </a:fld>
             <a:endParaRPr lang="en-US" dirty="0"/>
           </a:p>
@@ -3567,7 +3580,7 @@
             <a:fld id="{B61BEF0D-F0BB-DE4B-95CE-6DB70DBA9567}" type="datetimeFigureOut">
               <a:rPr lang="en-US" dirty="0"/>
               <a:pPr/>
-              <a:t>6/1/25</a:t>
+              <a:t>7/24/25</a:t>
             </a:fld>
             <a:endParaRPr lang="en-US" dirty="0"/>
           </a:p>
@@ -3830,7 +3843,7 @@
             <a:fld id="{B61BEF0D-F0BB-DE4B-95CE-6DB70DBA9567}" type="datetimeFigureOut">
               <a:rPr lang="en-US" dirty="0"/>
               <a:pPr/>
-              <a:t>6/1/25</a:t>
+              <a:t>7/24/25</a:t>
             </a:fld>
             <a:endParaRPr lang="en-US" dirty="0"/>
           </a:p>
@@ -4201,7 +4214,7 @@
             <a:fld id="{B61BEF0D-F0BB-DE4B-95CE-6DB70DBA9567}" type="datetimeFigureOut">
               <a:rPr lang="en-US" dirty="0"/>
               <a:pPr/>
-              <a:t>6/1/25</a:t>
+              <a:t>7/24/25</a:t>
             </a:fld>
             <a:endParaRPr lang="en-US" dirty="0"/>
           </a:p>
@@ -4346,7 +4359,7 @@
             <a:fld id="{B61BEF0D-F0BB-DE4B-95CE-6DB70DBA9567}" type="datetimeFigureOut">
               <a:rPr lang="en-US" dirty="0"/>
               <a:pPr/>
-              <a:t>6/1/25</a:t>
+              <a:t>7/24/25</a:t>
             </a:fld>
             <a:endParaRPr lang="en-US" dirty="0"/>
           </a:p>
@@ -4468,7 +4481,7 @@
             <a:fld id="{B61BEF0D-F0BB-DE4B-95CE-6DB70DBA9567}" type="datetimeFigureOut">
               <a:rPr lang="en-US" dirty="0"/>
               <a:pPr/>
-              <a:t>6/1/25</a:t>
+              <a:t>7/24/25</a:t>
             </a:fld>
             <a:endParaRPr lang="en-US" dirty="0"/>
           </a:p>
@@ -4750,7 +4763,7 @@
             <a:fld id="{B61BEF0D-F0BB-DE4B-95CE-6DB70DBA9567}" type="datetimeFigureOut">
               <a:rPr lang="en-US" dirty="0"/>
               <a:pPr/>
-              <a:t>6/1/25</a:t>
+              <a:t>7/24/25</a:t>
             </a:fld>
             <a:endParaRPr lang="en-US" dirty="0"/>
           </a:p>
@@ -5071,7 +5084,7 @@
             <a:fld id="{B61BEF0D-F0BB-DE4B-95CE-6DB70DBA9567}" type="datetimeFigureOut">
               <a:rPr lang="en-US" dirty="0"/>
               <a:pPr/>
-              <a:t>6/1/25</a:t>
+              <a:t>7/24/25</a:t>
             </a:fld>
             <a:endParaRPr lang="en-US" dirty="0"/>
           </a:p>
@@ -5282,7 +5295,7 @@
             <a:fld id="{B61BEF0D-F0BB-DE4B-95CE-6DB70DBA9567}" type="datetimeFigureOut">
               <a:rPr lang="en-US" dirty="0"/>
               <a:pPr/>
-              <a:t>6/1/25</a:t>
+              <a:t>7/24/25</a:t>
             </a:fld>
             <a:endParaRPr lang="en-US" dirty="0"/>
           </a:p>
@@ -5860,6 +5873,2475 @@
 </p:sld>
 </file>
 
+<file path=ppt/slides/slide10.xml><?xml version="1.0" encoding="utf-8"?>
+<p:sld xmlns:a="http://schemas.openxmlformats.org/drawingml/2006/main" xmlns:r="http://schemas.openxmlformats.org/officeDocument/2006/relationships" xmlns:p="http://schemas.openxmlformats.org/presentationml/2006/main">
+  <p:cSld>
+    <p:spTree>
+      <p:nvGrpSpPr>
+        <p:cNvPr id="1" name=""/>
+        <p:cNvGrpSpPr/>
+        <p:nvPr/>
+      </p:nvGrpSpPr>
+      <p:grpSpPr>
+        <a:xfrm>
+          <a:off x="0" y="0"/>
+          <a:ext cx="0" cy="0"/>
+          <a:chOff x="0" y="0"/>
+          <a:chExt cx="0" cy="0"/>
+        </a:xfrm>
+      </p:grpSpPr>
+      <p:pic>
+        <p:nvPicPr>
+          <p:cNvPr id="3" name="Picture 2">
+            <a:extLst>
+              <a:ext uri="{FF2B5EF4-FFF2-40B4-BE49-F238E27FC236}">
+                <a16:creationId xmlns:a16="http://schemas.microsoft.com/office/drawing/2014/main" id="{A4A8CA84-A029-B892-99EF-BDB322581B77}"/>
+              </a:ext>
+            </a:extLst>
+          </p:cNvPr>
+          <p:cNvPicPr>
+            <a:picLocks noChangeAspect="1"/>
+          </p:cNvPicPr>
+          <p:nvPr/>
+        </p:nvPicPr>
+        <p:blipFill>
+          <a:blip r:embed="rId2"/>
+          <a:stretch>
+            <a:fillRect/>
+          </a:stretch>
+        </p:blipFill>
+        <p:spPr>
+          <a:xfrm>
+            <a:off x="3695700" y="2571750"/>
+            <a:ext cx="4800600" cy="1714500"/>
+          </a:xfrm>
+          <a:prstGeom prst="rect">
+            <a:avLst/>
+          </a:prstGeom>
+        </p:spPr>
+      </p:pic>
+    </p:spTree>
+    <p:extLst>
+      <p:ext uri="{BB962C8B-B14F-4D97-AF65-F5344CB8AC3E}">
+        <p14:creationId xmlns:p14="http://schemas.microsoft.com/office/powerpoint/2010/main" val="143415558"/>
+      </p:ext>
+    </p:extLst>
+  </p:cSld>
+  <p:clrMapOvr>
+    <a:masterClrMapping/>
+  </p:clrMapOvr>
+</p:sld>
+</file>
+
+<file path=ppt/slides/slide11.xml><?xml version="1.0" encoding="utf-8"?>
+<p:sld xmlns:a="http://schemas.openxmlformats.org/drawingml/2006/main" xmlns:r="http://schemas.openxmlformats.org/officeDocument/2006/relationships" xmlns:p="http://schemas.openxmlformats.org/presentationml/2006/main">
+  <p:cSld>
+    <p:spTree>
+      <p:nvGrpSpPr>
+        <p:cNvPr id="1" name=""/>
+        <p:cNvGrpSpPr/>
+        <p:nvPr/>
+      </p:nvGrpSpPr>
+      <p:grpSpPr>
+        <a:xfrm>
+          <a:off x="0" y="0"/>
+          <a:ext cx="0" cy="0"/>
+          <a:chOff x="0" y="0"/>
+          <a:chExt cx="0" cy="0"/>
+        </a:xfrm>
+      </p:grpSpPr>
+      <p:sp>
+        <p:nvSpPr>
+          <p:cNvPr id="2" name="Title 1">
+            <a:extLst>
+              <a:ext uri="{FF2B5EF4-FFF2-40B4-BE49-F238E27FC236}">
+                <a16:creationId xmlns:a16="http://schemas.microsoft.com/office/drawing/2014/main" id="{68EED630-F7B4-AB38-9560-68B104D6B7E7}"/>
+              </a:ext>
+            </a:extLst>
+          </p:cNvPr>
+          <p:cNvSpPr>
+            <a:spLocks noGrp="1"/>
+          </p:cNvSpPr>
+          <p:nvPr>
+            <p:ph type="title"/>
+          </p:nvPr>
+        </p:nvSpPr>
+        <p:spPr/>
+        <p:txBody>
+          <a:bodyPr/>
+          <a:lstStyle/>
+          <a:p>
+            <a:r>
+              <a:rPr lang="en-US" dirty="0"/>
+              <a:t>While loop – first run</a:t>
+            </a:r>
+          </a:p>
+        </p:txBody>
+      </p:sp>
+      <p:graphicFrame>
+        <p:nvGraphicFramePr>
+          <p:cNvPr id="4" name="Content Placeholder 3">
+            <a:extLst>
+              <a:ext uri="{FF2B5EF4-FFF2-40B4-BE49-F238E27FC236}">
+                <a16:creationId xmlns:a16="http://schemas.microsoft.com/office/drawing/2014/main" id="{26F97BD2-005A-67F4-EE18-185B892A1F3B}"/>
+              </a:ext>
+            </a:extLst>
+          </p:cNvPr>
+          <p:cNvGraphicFramePr>
+            <a:graphicFrameLocks noGrp="1"/>
+          </p:cNvGraphicFramePr>
+          <p:nvPr>
+            <p:ph idx="1"/>
+            <p:extLst>
+              <p:ext uri="{D42A27DB-BD31-4B8C-83A1-F6EECF244321}">
+                <p14:modId xmlns:p14="http://schemas.microsoft.com/office/powerpoint/2010/main" val="1504176357"/>
+              </p:ext>
+            </p:extLst>
+          </p:nvPr>
+        </p:nvGraphicFramePr>
+        <p:xfrm>
+          <a:off x="685800" y="2141538"/>
+          <a:ext cx="10131425" cy="4211320"/>
+        </p:xfrm>
+        <a:graphic>
+          <a:graphicData uri="http://schemas.openxmlformats.org/drawingml/2006/table">
+            <a:tbl>
+              <a:tblPr firstRow="1" bandRow="1">
+                <a:tableStyleId>{5C22544A-7EE6-4342-B048-85BDC9FD1C3A}</a:tableStyleId>
+              </a:tblPr>
+              <a:tblGrid>
+                <a:gridCol w="2026285">
+                  <a:extLst>
+                    <a:ext uri="{9D8B030D-6E8A-4147-A177-3AD203B41FA5}">
+                      <a16:colId xmlns:a16="http://schemas.microsoft.com/office/drawing/2014/main" val="94462144"/>
+                    </a:ext>
+                  </a:extLst>
+                </a:gridCol>
+                <a:gridCol w="2026285">
+                  <a:extLst>
+                    <a:ext uri="{9D8B030D-6E8A-4147-A177-3AD203B41FA5}">
+                      <a16:colId xmlns:a16="http://schemas.microsoft.com/office/drawing/2014/main" val="1467820159"/>
+                    </a:ext>
+                  </a:extLst>
+                </a:gridCol>
+                <a:gridCol w="2026285">
+                  <a:extLst>
+                    <a:ext uri="{9D8B030D-6E8A-4147-A177-3AD203B41FA5}">
+                      <a16:colId xmlns:a16="http://schemas.microsoft.com/office/drawing/2014/main" val="744455756"/>
+                    </a:ext>
+                  </a:extLst>
+                </a:gridCol>
+                <a:gridCol w="2026285">
+                  <a:extLst>
+                    <a:ext uri="{9D8B030D-6E8A-4147-A177-3AD203B41FA5}">
+                      <a16:colId xmlns:a16="http://schemas.microsoft.com/office/drawing/2014/main" val="1444762233"/>
+                    </a:ext>
+                  </a:extLst>
+                </a:gridCol>
+                <a:gridCol w="2026285">
+                  <a:extLst>
+                    <a:ext uri="{9D8B030D-6E8A-4147-A177-3AD203B41FA5}">
+                      <a16:colId xmlns:a16="http://schemas.microsoft.com/office/drawing/2014/main" val="27683706"/>
+                    </a:ext>
+                  </a:extLst>
+                </a:gridCol>
+              </a:tblGrid>
+              <a:tr h="370840">
+                <a:tc>
+                  <a:txBody>
+                    <a:bodyPr/>
+                    <a:lstStyle/>
+                    <a:p>
+                      <a:r>
+                        <a:rPr lang="en-US" dirty="0"/>
+                        <a:t>Prompt</a:t>
+                      </a:r>
+                    </a:p>
+                  </a:txBody>
+                  <a:tcPr/>
+                </a:tc>
+                <a:tc>
+                  <a:txBody>
+                    <a:bodyPr/>
+                    <a:lstStyle/>
+                    <a:p>
+                      <a:r>
+                        <a:rPr lang="en-US" dirty="0"/>
+                        <a:t>Value of letter</a:t>
+                      </a:r>
+                    </a:p>
+                  </a:txBody>
+                  <a:tcPr/>
+                </a:tc>
+                <a:tc>
+                  <a:txBody>
+                    <a:bodyPr/>
+                    <a:lstStyle/>
+                    <a:p>
+                      <a:r>
+                        <a:rPr lang="en-US" dirty="0"/>
+                        <a:t>Is condition met?</a:t>
+                      </a:r>
+                    </a:p>
+                    <a:p>
+                      <a:r>
+                        <a:rPr lang="en-US" dirty="0"/>
+                        <a:t>(letter !== “p”)</a:t>
+                      </a:r>
+                    </a:p>
+                  </a:txBody>
+                  <a:tcPr/>
+                </a:tc>
+                <a:tc>
+                  <a:txBody>
+                    <a:bodyPr/>
+                    <a:lstStyle/>
+                    <a:p>
+                      <a:r>
+                        <a:rPr lang="en-US" dirty="0"/>
+                        <a:t>Execute loop body?</a:t>
+                      </a:r>
+                    </a:p>
+                  </a:txBody>
+                  <a:tcPr/>
+                </a:tc>
+                <a:tc>
+                  <a:txBody>
+                    <a:bodyPr/>
+                    <a:lstStyle/>
+                    <a:p>
+                      <a:r>
+                        <a:rPr lang="en-US" dirty="0"/>
+                        <a:t>Alert</a:t>
+                      </a:r>
+                    </a:p>
+                  </a:txBody>
+                  <a:tcPr/>
+                </a:tc>
+                <a:extLst>
+                  <a:ext uri="{0D108BD9-81ED-4DB2-BD59-A6C34878D82A}">
+                    <a16:rowId xmlns:a16="http://schemas.microsoft.com/office/drawing/2014/main" val="2966389548"/>
+                  </a:ext>
+                </a:extLst>
+              </a:tr>
+              <a:tr h="370840">
+                <a:tc>
+                  <a:txBody>
+                    <a:bodyPr/>
+                    <a:lstStyle/>
+                    <a:p>
+                      <a:r>
+                        <a:rPr lang="en-US" dirty="0"/>
+                        <a:t>“Type the letter ‘p’”</a:t>
+                      </a:r>
+                    </a:p>
+                  </a:txBody>
+                  <a:tcPr/>
+                </a:tc>
+                <a:tc>
+                  <a:txBody>
+                    <a:bodyPr/>
+                    <a:lstStyle/>
+                    <a:p>
+                      <a:r>
+                        <a:rPr lang="en-US" dirty="0"/>
+                        <a:t>“h”</a:t>
+                      </a:r>
+                    </a:p>
+                  </a:txBody>
+                  <a:tcPr/>
+                </a:tc>
+                <a:tc>
+                  <a:txBody>
+                    <a:bodyPr/>
+                    <a:lstStyle/>
+                    <a:p>
+                      <a:r>
+                        <a:rPr lang="en-US" dirty="0"/>
+                        <a:t>true</a:t>
+                      </a:r>
+                    </a:p>
+                  </a:txBody>
+                  <a:tcPr/>
+                </a:tc>
+                <a:tc>
+                  <a:txBody>
+                    <a:bodyPr/>
+                    <a:lstStyle/>
+                    <a:p>
+                      <a:r>
+                        <a:rPr lang="en-US" dirty="0"/>
+                        <a:t>Yes</a:t>
+                      </a:r>
+                    </a:p>
+                  </a:txBody>
+                  <a:tcPr/>
+                </a:tc>
+                <a:tc>
+                  <a:txBody>
+                    <a:bodyPr/>
+                    <a:lstStyle/>
+                    <a:p>
+                      <a:r>
+                        <a:rPr lang="en-US" dirty="0"/>
+                        <a:t>“That’s not the letter p!”</a:t>
+                      </a:r>
+                    </a:p>
+                  </a:txBody>
+                  <a:tcPr/>
+                </a:tc>
+                <a:extLst>
+                  <a:ext uri="{0D108BD9-81ED-4DB2-BD59-A6C34878D82A}">
+                    <a16:rowId xmlns:a16="http://schemas.microsoft.com/office/drawing/2014/main" val="2467284032"/>
+                  </a:ext>
+                </a:extLst>
+              </a:tr>
+              <a:tr h="370840">
+                <a:tc>
+                  <a:txBody>
+                    <a:bodyPr/>
+                    <a:lstStyle/>
+                    <a:p>
+                      <a:r>
+                        <a:rPr lang="en-US" dirty="0"/>
+                        <a:t>“Try again”</a:t>
+                      </a:r>
+                    </a:p>
+                  </a:txBody>
+                  <a:tcPr/>
+                </a:tc>
+                <a:tc>
+                  <a:txBody>
+                    <a:bodyPr/>
+                    <a:lstStyle/>
+                    <a:p>
+                      <a:r>
+                        <a:rPr lang="en-US" dirty="0"/>
+                        <a:t>“s”</a:t>
+                      </a:r>
+                    </a:p>
+                  </a:txBody>
+                  <a:tcPr/>
+                </a:tc>
+                <a:tc>
+                  <a:txBody>
+                    <a:bodyPr/>
+                    <a:lstStyle/>
+                    <a:p>
+                      <a:r>
+                        <a:rPr lang="en-US" dirty="0"/>
+                        <a:t>true</a:t>
+                      </a:r>
+                    </a:p>
+                  </a:txBody>
+                  <a:tcPr/>
+                </a:tc>
+                <a:tc>
+                  <a:txBody>
+                    <a:bodyPr/>
+                    <a:lstStyle/>
+                    <a:p>
+                      <a:r>
+                        <a:rPr lang="en-US" dirty="0"/>
+                        <a:t>Yes</a:t>
+                      </a:r>
+                    </a:p>
+                  </a:txBody>
+                  <a:tcPr/>
+                </a:tc>
+                <a:tc>
+                  <a:txBody>
+                    <a:bodyPr/>
+                    <a:lstStyle/>
+                    <a:p>
+                      <a:r>
+                        <a:rPr lang="en-US" dirty="0"/>
+                        <a:t>“That’s not the letter p!”</a:t>
+                      </a:r>
+                    </a:p>
+                  </a:txBody>
+                  <a:tcPr/>
+                </a:tc>
+                <a:extLst>
+                  <a:ext uri="{0D108BD9-81ED-4DB2-BD59-A6C34878D82A}">
+                    <a16:rowId xmlns:a16="http://schemas.microsoft.com/office/drawing/2014/main" val="2322214608"/>
+                  </a:ext>
+                </a:extLst>
+              </a:tr>
+              <a:tr h="370840">
+                <a:tc>
+                  <a:txBody>
+                    <a:bodyPr/>
+                    <a:lstStyle/>
+                    <a:p>
+                      <a:r>
+                        <a:rPr lang="en-US" dirty="0"/>
+                        <a:t>“Try again”</a:t>
+                      </a:r>
+                    </a:p>
+                  </a:txBody>
+                  <a:tcPr/>
+                </a:tc>
+                <a:tc>
+                  <a:txBody>
+                    <a:bodyPr/>
+                    <a:lstStyle/>
+                    <a:p>
+                      <a:r>
+                        <a:rPr lang="en-US" dirty="0"/>
+                        <a:t>“;”</a:t>
+                      </a:r>
+                    </a:p>
+                  </a:txBody>
+                  <a:tcPr/>
+                </a:tc>
+                <a:tc>
+                  <a:txBody>
+                    <a:bodyPr/>
+                    <a:lstStyle/>
+                    <a:p>
+                      <a:r>
+                        <a:rPr lang="en-US" dirty="0"/>
+                        <a:t>true</a:t>
+                      </a:r>
+                    </a:p>
+                  </a:txBody>
+                  <a:tcPr/>
+                </a:tc>
+                <a:tc>
+                  <a:txBody>
+                    <a:bodyPr/>
+                    <a:lstStyle/>
+                    <a:p>
+                      <a:r>
+                        <a:rPr lang="en-US" dirty="0"/>
+                        <a:t>Yes</a:t>
+                      </a:r>
+                    </a:p>
+                  </a:txBody>
+                  <a:tcPr/>
+                </a:tc>
+                <a:tc>
+                  <a:txBody>
+                    <a:bodyPr/>
+                    <a:lstStyle/>
+                    <a:p>
+                      <a:r>
+                        <a:rPr lang="en-US" dirty="0"/>
+                        <a:t>“That’s not the letter p!”</a:t>
+                      </a:r>
+                    </a:p>
+                  </a:txBody>
+                  <a:tcPr/>
+                </a:tc>
+                <a:extLst>
+                  <a:ext uri="{0D108BD9-81ED-4DB2-BD59-A6C34878D82A}">
+                    <a16:rowId xmlns:a16="http://schemas.microsoft.com/office/drawing/2014/main" val="2579902674"/>
+                  </a:ext>
+                </a:extLst>
+              </a:tr>
+              <a:tr h="370840">
+                <a:tc>
+                  <a:txBody>
+                    <a:bodyPr/>
+                    <a:lstStyle/>
+                    <a:p>
+                      <a:r>
+                        <a:rPr lang="en-US" dirty="0"/>
+                        <a:t>“Try again”</a:t>
+                      </a:r>
+                    </a:p>
+                  </a:txBody>
+                  <a:tcPr/>
+                </a:tc>
+                <a:tc>
+                  <a:txBody>
+                    <a:bodyPr/>
+                    <a:lstStyle/>
+                    <a:p>
+                      <a:r>
+                        <a:rPr lang="en-US" dirty="0"/>
+                        <a:t>“P”</a:t>
+                      </a:r>
+                    </a:p>
+                  </a:txBody>
+                  <a:tcPr/>
+                </a:tc>
+                <a:tc>
+                  <a:txBody>
+                    <a:bodyPr/>
+                    <a:lstStyle/>
+                    <a:p>
+                      <a:r>
+                        <a:rPr lang="en-US" dirty="0"/>
+                        <a:t>true</a:t>
+                      </a:r>
+                    </a:p>
+                  </a:txBody>
+                  <a:tcPr/>
+                </a:tc>
+                <a:tc>
+                  <a:txBody>
+                    <a:bodyPr/>
+                    <a:lstStyle/>
+                    <a:p>
+                      <a:r>
+                        <a:rPr lang="en-US" dirty="0"/>
+                        <a:t>Yes</a:t>
+                      </a:r>
+                    </a:p>
+                  </a:txBody>
+                  <a:tcPr/>
+                </a:tc>
+                <a:tc>
+                  <a:txBody>
+                    <a:bodyPr/>
+                    <a:lstStyle/>
+                    <a:p>
+                      <a:r>
+                        <a:rPr lang="en-US" dirty="0"/>
+                        <a:t>“That’s not the letter p!”</a:t>
+                      </a:r>
+                    </a:p>
+                  </a:txBody>
+                  <a:tcPr/>
+                </a:tc>
+                <a:extLst>
+                  <a:ext uri="{0D108BD9-81ED-4DB2-BD59-A6C34878D82A}">
+                    <a16:rowId xmlns:a16="http://schemas.microsoft.com/office/drawing/2014/main" val="372043856"/>
+                  </a:ext>
+                </a:extLst>
+              </a:tr>
+              <a:tr h="370840">
+                <a:tc>
+                  <a:txBody>
+                    <a:bodyPr/>
+                    <a:lstStyle/>
+                    <a:p>
+                      <a:r>
+                        <a:rPr lang="en-US" dirty="0"/>
+                        <a:t>“Try again”</a:t>
+                      </a:r>
+                    </a:p>
+                  </a:txBody>
+                  <a:tcPr/>
+                </a:tc>
+                <a:tc>
+                  <a:txBody>
+                    <a:bodyPr/>
+                    <a:lstStyle/>
+                    <a:p>
+                      <a:r>
+                        <a:rPr lang="en-US" dirty="0"/>
+                        <a:t>“2”</a:t>
+                      </a:r>
+                    </a:p>
+                  </a:txBody>
+                  <a:tcPr/>
+                </a:tc>
+                <a:tc>
+                  <a:txBody>
+                    <a:bodyPr/>
+                    <a:lstStyle/>
+                    <a:p>
+                      <a:r>
+                        <a:rPr lang="en-US" dirty="0"/>
+                        <a:t>true</a:t>
+                      </a:r>
+                    </a:p>
+                  </a:txBody>
+                  <a:tcPr/>
+                </a:tc>
+                <a:tc>
+                  <a:txBody>
+                    <a:bodyPr/>
+                    <a:lstStyle/>
+                    <a:p>
+                      <a:r>
+                        <a:rPr lang="en-US" dirty="0"/>
+                        <a:t>Yes</a:t>
+                      </a:r>
+                    </a:p>
+                  </a:txBody>
+                  <a:tcPr/>
+                </a:tc>
+                <a:tc>
+                  <a:txBody>
+                    <a:bodyPr/>
+                    <a:lstStyle/>
+                    <a:p>
+                      <a:r>
+                        <a:rPr lang="en-US" dirty="0"/>
+                        <a:t>“That’s not the letter p!”</a:t>
+                      </a:r>
+                    </a:p>
+                  </a:txBody>
+                  <a:tcPr/>
+                </a:tc>
+                <a:extLst>
+                  <a:ext uri="{0D108BD9-81ED-4DB2-BD59-A6C34878D82A}">
+                    <a16:rowId xmlns:a16="http://schemas.microsoft.com/office/drawing/2014/main" val="413537706"/>
+                  </a:ext>
+                </a:extLst>
+              </a:tr>
+              <a:tr h="370840">
+                <a:tc>
+                  <a:txBody>
+                    <a:bodyPr/>
+                    <a:lstStyle/>
+                    <a:p>
+                      <a:r>
+                        <a:rPr lang="en-US" dirty="0"/>
+                        <a:t>“Try again”</a:t>
+                      </a:r>
+                    </a:p>
+                  </a:txBody>
+                  <a:tcPr/>
+                </a:tc>
+                <a:tc>
+                  <a:txBody>
+                    <a:bodyPr/>
+                    <a:lstStyle/>
+                    <a:p>
+                      <a:r>
+                        <a:rPr lang="en-US" dirty="0"/>
+                        <a:t>“p”</a:t>
+                      </a:r>
+                    </a:p>
+                  </a:txBody>
+                  <a:tcPr/>
+                </a:tc>
+                <a:tc>
+                  <a:txBody>
+                    <a:bodyPr/>
+                    <a:lstStyle/>
+                    <a:p>
+                      <a:r>
+                        <a:rPr lang="en-US" dirty="0"/>
+                        <a:t>false</a:t>
+                      </a:r>
+                    </a:p>
+                  </a:txBody>
+                  <a:tcPr/>
+                </a:tc>
+                <a:tc>
+                  <a:txBody>
+                    <a:bodyPr/>
+                    <a:lstStyle/>
+                    <a:p>
+                      <a:r>
+                        <a:rPr lang="en-US" dirty="0"/>
+                        <a:t>No</a:t>
+                      </a:r>
+                    </a:p>
+                  </a:txBody>
+                  <a:tcPr/>
+                </a:tc>
+                <a:tc>
+                  <a:txBody>
+                    <a:bodyPr/>
+                    <a:lstStyle/>
+                    <a:p>
+                      <a:r>
+                        <a:rPr lang="en-US" dirty="0"/>
+                        <a:t>“Good job!”</a:t>
+                      </a:r>
+                    </a:p>
+                  </a:txBody>
+                  <a:tcPr/>
+                </a:tc>
+                <a:extLst>
+                  <a:ext uri="{0D108BD9-81ED-4DB2-BD59-A6C34878D82A}">
+                    <a16:rowId xmlns:a16="http://schemas.microsoft.com/office/drawing/2014/main" val="3922011451"/>
+                  </a:ext>
+                </a:extLst>
+              </a:tr>
+            </a:tbl>
+          </a:graphicData>
+        </a:graphic>
+      </p:graphicFrame>
+    </p:spTree>
+    <p:extLst>
+      <p:ext uri="{BB962C8B-B14F-4D97-AF65-F5344CB8AC3E}">
+        <p14:creationId xmlns:p14="http://schemas.microsoft.com/office/powerpoint/2010/main" val="732833150"/>
+      </p:ext>
+    </p:extLst>
+  </p:cSld>
+  <p:clrMapOvr>
+    <a:masterClrMapping/>
+  </p:clrMapOvr>
+</p:sld>
+</file>
+
+<file path=ppt/slides/slide12.xml><?xml version="1.0" encoding="utf-8"?>
+<p:sld xmlns:a="http://schemas.openxmlformats.org/drawingml/2006/main" xmlns:r="http://schemas.openxmlformats.org/officeDocument/2006/relationships" xmlns:p="http://schemas.openxmlformats.org/presentationml/2006/main">
+  <p:cSld>
+    <p:spTree>
+      <p:nvGrpSpPr>
+        <p:cNvPr id="1" name="">
+          <a:extLst>
+            <a:ext uri="{FF2B5EF4-FFF2-40B4-BE49-F238E27FC236}">
+              <a16:creationId xmlns:a16="http://schemas.microsoft.com/office/drawing/2014/main" id="{C0B89A9F-AFC0-DA90-54A0-37CB8362B91E}"/>
+            </a:ext>
+          </a:extLst>
+        </p:cNvPr>
+        <p:cNvGrpSpPr/>
+        <p:nvPr/>
+      </p:nvGrpSpPr>
+      <p:grpSpPr>
+        <a:xfrm>
+          <a:off x="0" y="0"/>
+          <a:ext cx="0" cy="0"/>
+          <a:chOff x="0" y="0"/>
+          <a:chExt cx="0" cy="0"/>
+        </a:xfrm>
+      </p:grpSpPr>
+      <p:sp>
+        <p:nvSpPr>
+          <p:cNvPr id="2" name="Title 1">
+            <a:extLst>
+              <a:ext uri="{FF2B5EF4-FFF2-40B4-BE49-F238E27FC236}">
+                <a16:creationId xmlns:a16="http://schemas.microsoft.com/office/drawing/2014/main" id="{7A06A95A-6A0A-894A-5F83-AFD82EE67EB0}"/>
+              </a:ext>
+            </a:extLst>
+          </p:cNvPr>
+          <p:cNvSpPr>
+            <a:spLocks noGrp="1"/>
+          </p:cNvSpPr>
+          <p:nvPr>
+            <p:ph type="title"/>
+          </p:nvPr>
+        </p:nvSpPr>
+        <p:spPr/>
+        <p:txBody>
+          <a:bodyPr/>
+          <a:lstStyle/>
+          <a:p>
+            <a:r>
+              <a:rPr lang="en-US" dirty="0"/>
+              <a:t>While loop – second run</a:t>
+            </a:r>
+          </a:p>
+        </p:txBody>
+      </p:sp>
+      <p:graphicFrame>
+        <p:nvGraphicFramePr>
+          <p:cNvPr id="4" name="Content Placeholder 3">
+            <a:extLst>
+              <a:ext uri="{FF2B5EF4-FFF2-40B4-BE49-F238E27FC236}">
+                <a16:creationId xmlns:a16="http://schemas.microsoft.com/office/drawing/2014/main" id="{483E5CDB-0BF2-C7A1-B74A-FB655895DC51}"/>
+              </a:ext>
+            </a:extLst>
+          </p:cNvPr>
+          <p:cNvGraphicFramePr>
+            <a:graphicFrameLocks noGrp="1"/>
+          </p:cNvGraphicFramePr>
+          <p:nvPr>
+            <p:ph idx="1"/>
+            <p:extLst>
+              <p:ext uri="{D42A27DB-BD31-4B8C-83A1-F6EECF244321}">
+                <p14:modId xmlns:p14="http://schemas.microsoft.com/office/powerpoint/2010/main" val="1198197156"/>
+              </p:ext>
+            </p:extLst>
+          </p:nvPr>
+        </p:nvGraphicFramePr>
+        <p:xfrm>
+          <a:off x="685800" y="2141538"/>
+          <a:ext cx="10131425" cy="2931160"/>
+        </p:xfrm>
+        <a:graphic>
+          <a:graphicData uri="http://schemas.openxmlformats.org/drawingml/2006/table">
+            <a:tbl>
+              <a:tblPr firstRow="1" bandRow="1">
+                <a:tableStyleId>{5C22544A-7EE6-4342-B048-85BDC9FD1C3A}</a:tableStyleId>
+              </a:tblPr>
+              <a:tblGrid>
+                <a:gridCol w="2026285">
+                  <a:extLst>
+                    <a:ext uri="{9D8B030D-6E8A-4147-A177-3AD203B41FA5}">
+                      <a16:colId xmlns:a16="http://schemas.microsoft.com/office/drawing/2014/main" val="94462144"/>
+                    </a:ext>
+                  </a:extLst>
+                </a:gridCol>
+                <a:gridCol w="2026285">
+                  <a:extLst>
+                    <a:ext uri="{9D8B030D-6E8A-4147-A177-3AD203B41FA5}">
+                      <a16:colId xmlns:a16="http://schemas.microsoft.com/office/drawing/2014/main" val="1467820159"/>
+                    </a:ext>
+                  </a:extLst>
+                </a:gridCol>
+                <a:gridCol w="2026285">
+                  <a:extLst>
+                    <a:ext uri="{9D8B030D-6E8A-4147-A177-3AD203B41FA5}">
+                      <a16:colId xmlns:a16="http://schemas.microsoft.com/office/drawing/2014/main" val="744455756"/>
+                    </a:ext>
+                  </a:extLst>
+                </a:gridCol>
+                <a:gridCol w="2026285">
+                  <a:extLst>
+                    <a:ext uri="{9D8B030D-6E8A-4147-A177-3AD203B41FA5}">
+                      <a16:colId xmlns:a16="http://schemas.microsoft.com/office/drawing/2014/main" val="1444762233"/>
+                    </a:ext>
+                  </a:extLst>
+                </a:gridCol>
+                <a:gridCol w="2026285">
+                  <a:extLst>
+                    <a:ext uri="{9D8B030D-6E8A-4147-A177-3AD203B41FA5}">
+                      <a16:colId xmlns:a16="http://schemas.microsoft.com/office/drawing/2014/main" val="27683706"/>
+                    </a:ext>
+                  </a:extLst>
+                </a:gridCol>
+              </a:tblGrid>
+              <a:tr h="370840">
+                <a:tc>
+                  <a:txBody>
+                    <a:bodyPr/>
+                    <a:lstStyle/>
+                    <a:p>
+                      <a:r>
+                        <a:rPr lang="en-US" dirty="0"/>
+                        <a:t>Prompt</a:t>
+                      </a:r>
+                    </a:p>
+                  </a:txBody>
+                  <a:tcPr/>
+                </a:tc>
+                <a:tc>
+                  <a:txBody>
+                    <a:bodyPr/>
+                    <a:lstStyle/>
+                    <a:p>
+                      <a:r>
+                        <a:rPr lang="en-US" dirty="0"/>
+                        <a:t>Value of letter</a:t>
+                      </a:r>
+                    </a:p>
+                  </a:txBody>
+                  <a:tcPr/>
+                </a:tc>
+                <a:tc>
+                  <a:txBody>
+                    <a:bodyPr/>
+                    <a:lstStyle/>
+                    <a:p>
+                      <a:r>
+                        <a:rPr lang="en-US" dirty="0"/>
+                        <a:t>Is condition met?</a:t>
+                      </a:r>
+                    </a:p>
+                    <a:p>
+                      <a:r>
+                        <a:rPr lang="en-US" dirty="0"/>
+                        <a:t>(letter !== “p”)</a:t>
+                      </a:r>
+                    </a:p>
+                  </a:txBody>
+                  <a:tcPr/>
+                </a:tc>
+                <a:tc>
+                  <a:txBody>
+                    <a:bodyPr/>
+                    <a:lstStyle/>
+                    <a:p>
+                      <a:r>
+                        <a:rPr lang="en-US" dirty="0"/>
+                        <a:t>Execute loop body?</a:t>
+                      </a:r>
+                    </a:p>
+                  </a:txBody>
+                  <a:tcPr/>
+                </a:tc>
+                <a:tc>
+                  <a:txBody>
+                    <a:bodyPr/>
+                    <a:lstStyle/>
+                    <a:p>
+                      <a:r>
+                        <a:rPr lang="en-US" dirty="0"/>
+                        <a:t>Alert</a:t>
+                      </a:r>
+                    </a:p>
+                  </a:txBody>
+                  <a:tcPr/>
+                </a:tc>
+                <a:extLst>
+                  <a:ext uri="{0D108BD9-81ED-4DB2-BD59-A6C34878D82A}">
+                    <a16:rowId xmlns:a16="http://schemas.microsoft.com/office/drawing/2014/main" val="2966389548"/>
+                  </a:ext>
+                </a:extLst>
+              </a:tr>
+              <a:tr h="370840">
+                <a:tc>
+                  <a:txBody>
+                    <a:bodyPr/>
+                    <a:lstStyle/>
+                    <a:p>
+                      <a:r>
+                        <a:rPr lang="en-US" dirty="0"/>
+                        <a:t>“Type the letter ‘p’”</a:t>
+                      </a:r>
+                    </a:p>
+                  </a:txBody>
+                  <a:tcPr/>
+                </a:tc>
+                <a:tc>
+                  <a:txBody>
+                    <a:bodyPr/>
+                    <a:lstStyle/>
+                    <a:p>
+                      <a:r>
+                        <a:rPr lang="en-US" dirty="0"/>
+                        <a:t>“j”</a:t>
+                      </a:r>
+                    </a:p>
+                  </a:txBody>
+                  <a:tcPr/>
+                </a:tc>
+                <a:tc>
+                  <a:txBody>
+                    <a:bodyPr/>
+                    <a:lstStyle/>
+                    <a:p>
+                      <a:r>
+                        <a:rPr lang="en-US" dirty="0"/>
+                        <a:t>true</a:t>
+                      </a:r>
+                    </a:p>
+                  </a:txBody>
+                  <a:tcPr/>
+                </a:tc>
+                <a:tc>
+                  <a:txBody>
+                    <a:bodyPr/>
+                    <a:lstStyle/>
+                    <a:p>
+                      <a:r>
+                        <a:rPr lang="en-US" dirty="0"/>
+                        <a:t>Yes</a:t>
+                      </a:r>
+                    </a:p>
+                  </a:txBody>
+                  <a:tcPr/>
+                </a:tc>
+                <a:tc>
+                  <a:txBody>
+                    <a:bodyPr/>
+                    <a:lstStyle/>
+                    <a:p>
+                      <a:r>
+                        <a:rPr lang="en-US" dirty="0"/>
+                        <a:t>“That’s not the letter p!”</a:t>
+                      </a:r>
+                    </a:p>
+                  </a:txBody>
+                  <a:tcPr/>
+                </a:tc>
+                <a:extLst>
+                  <a:ext uri="{0D108BD9-81ED-4DB2-BD59-A6C34878D82A}">
+                    <a16:rowId xmlns:a16="http://schemas.microsoft.com/office/drawing/2014/main" val="2467284032"/>
+                  </a:ext>
+                </a:extLst>
+              </a:tr>
+              <a:tr h="370840">
+                <a:tc>
+                  <a:txBody>
+                    <a:bodyPr/>
+                    <a:lstStyle/>
+                    <a:p>
+                      <a:r>
+                        <a:rPr lang="en-US" dirty="0"/>
+                        <a:t>“Try again”</a:t>
+                      </a:r>
+                    </a:p>
+                  </a:txBody>
+                  <a:tcPr/>
+                </a:tc>
+                <a:tc>
+                  <a:txBody>
+                    <a:bodyPr/>
+                    <a:lstStyle/>
+                    <a:p>
+                      <a:r>
+                        <a:rPr lang="en-US" dirty="0"/>
+                        <a:t>“4”</a:t>
+                      </a:r>
+                    </a:p>
+                  </a:txBody>
+                  <a:tcPr/>
+                </a:tc>
+                <a:tc>
+                  <a:txBody>
+                    <a:bodyPr/>
+                    <a:lstStyle/>
+                    <a:p>
+                      <a:r>
+                        <a:rPr lang="en-US" dirty="0"/>
+                        <a:t>true</a:t>
+                      </a:r>
+                    </a:p>
+                  </a:txBody>
+                  <a:tcPr/>
+                </a:tc>
+                <a:tc>
+                  <a:txBody>
+                    <a:bodyPr/>
+                    <a:lstStyle/>
+                    <a:p>
+                      <a:r>
+                        <a:rPr lang="en-US" dirty="0"/>
+                        <a:t>Yes</a:t>
+                      </a:r>
+                    </a:p>
+                  </a:txBody>
+                  <a:tcPr/>
+                </a:tc>
+                <a:tc>
+                  <a:txBody>
+                    <a:bodyPr/>
+                    <a:lstStyle/>
+                    <a:p>
+                      <a:r>
+                        <a:rPr lang="en-US" dirty="0"/>
+                        <a:t>“That’s not the letter p!”</a:t>
+                      </a:r>
+                    </a:p>
+                  </a:txBody>
+                  <a:tcPr/>
+                </a:tc>
+                <a:extLst>
+                  <a:ext uri="{0D108BD9-81ED-4DB2-BD59-A6C34878D82A}">
+                    <a16:rowId xmlns:a16="http://schemas.microsoft.com/office/drawing/2014/main" val="2322214608"/>
+                  </a:ext>
+                </a:extLst>
+              </a:tr>
+              <a:tr h="370840">
+                <a:tc>
+                  <a:txBody>
+                    <a:bodyPr/>
+                    <a:lstStyle/>
+                    <a:p>
+                      <a:r>
+                        <a:rPr lang="en-US" dirty="0"/>
+                        <a:t>“Try again”</a:t>
+                      </a:r>
+                    </a:p>
+                  </a:txBody>
+                  <a:tcPr/>
+                </a:tc>
+                <a:tc>
+                  <a:txBody>
+                    <a:bodyPr/>
+                    <a:lstStyle/>
+                    <a:p>
+                      <a:r>
+                        <a:rPr lang="en-US" dirty="0"/>
+                        <a:t>“N”</a:t>
+                      </a:r>
+                    </a:p>
+                  </a:txBody>
+                  <a:tcPr/>
+                </a:tc>
+                <a:tc>
+                  <a:txBody>
+                    <a:bodyPr/>
+                    <a:lstStyle/>
+                    <a:p>
+                      <a:r>
+                        <a:rPr lang="en-US" dirty="0"/>
+                        <a:t>true</a:t>
+                      </a:r>
+                    </a:p>
+                  </a:txBody>
+                  <a:tcPr/>
+                </a:tc>
+                <a:tc>
+                  <a:txBody>
+                    <a:bodyPr/>
+                    <a:lstStyle/>
+                    <a:p>
+                      <a:r>
+                        <a:rPr lang="en-US" dirty="0"/>
+                        <a:t>Yes</a:t>
+                      </a:r>
+                    </a:p>
+                  </a:txBody>
+                  <a:tcPr/>
+                </a:tc>
+                <a:tc>
+                  <a:txBody>
+                    <a:bodyPr/>
+                    <a:lstStyle/>
+                    <a:p>
+                      <a:r>
+                        <a:rPr lang="en-US" dirty="0"/>
+                        <a:t>“That’s not the letter p!”</a:t>
+                      </a:r>
+                    </a:p>
+                  </a:txBody>
+                  <a:tcPr/>
+                </a:tc>
+                <a:extLst>
+                  <a:ext uri="{0D108BD9-81ED-4DB2-BD59-A6C34878D82A}">
+                    <a16:rowId xmlns:a16="http://schemas.microsoft.com/office/drawing/2014/main" val="2579902674"/>
+                  </a:ext>
+                </a:extLst>
+              </a:tr>
+              <a:tr h="370840">
+                <a:tc>
+                  <a:txBody>
+                    <a:bodyPr/>
+                    <a:lstStyle/>
+                    <a:p>
+                      <a:r>
+                        <a:rPr lang="en-US" dirty="0"/>
+                        <a:t>“Try again”</a:t>
+                      </a:r>
+                    </a:p>
+                  </a:txBody>
+                  <a:tcPr/>
+                </a:tc>
+                <a:tc>
+                  <a:txBody>
+                    <a:bodyPr/>
+                    <a:lstStyle/>
+                    <a:p>
+                      <a:r>
+                        <a:rPr lang="en-US" dirty="0"/>
+                        <a:t>“p”</a:t>
+                      </a:r>
+                    </a:p>
+                  </a:txBody>
+                  <a:tcPr/>
+                </a:tc>
+                <a:tc>
+                  <a:txBody>
+                    <a:bodyPr/>
+                    <a:lstStyle/>
+                    <a:p>
+                      <a:r>
+                        <a:rPr lang="en-US" dirty="0"/>
+                        <a:t>false</a:t>
+                      </a:r>
+                    </a:p>
+                  </a:txBody>
+                  <a:tcPr/>
+                </a:tc>
+                <a:tc>
+                  <a:txBody>
+                    <a:bodyPr/>
+                    <a:lstStyle/>
+                    <a:p>
+                      <a:r>
+                        <a:rPr lang="en-US" dirty="0"/>
+                        <a:t>No</a:t>
+                      </a:r>
+                    </a:p>
+                  </a:txBody>
+                  <a:tcPr/>
+                </a:tc>
+                <a:tc>
+                  <a:txBody>
+                    <a:bodyPr/>
+                    <a:lstStyle/>
+                    <a:p>
+                      <a:r>
+                        <a:rPr lang="en-US" dirty="0"/>
+                        <a:t>“Good job!”</a:t>
+                      </a:r>
+                    </a:p>
+                  </a:txBody>
+                  <a:tcPr/>
+                </a:tc>
+                <a:extLst>
+                  <a:ext uri="{0D108BD9-81ED-4DB2-BD59-A6C34878D82A}">
+                    <a16:rowId xmlns:a16="http://schemas.microsoft.com/office/drawing/2014/main" val="3922011451"/>
+                  </a:ext>
+                </a:extLst>
+              </a:tr>
+            </a:tbl>
+          </a:graphicData>
+        </a:graphic>
+      </p:graphicFrame>
+    </p:spTree>
+    <p:extLst>
+      <p:ext uri="{BB962C8B-B14F-4D97-AF65-F5344CB8AC3E}">
+        <p14:creationId xmlns:p14="http://schemas.microsoft.com/office/powerpoint/2010/main" val="3236846072"/>
+      </p:ext>
+    </p:extLst>
+  </p:cSld>
+  <p:clrMapOvr>
+    <a:masterClrMapping/>
+  </p:clrMapOvr>
+</p:sld>
+</file>
+
+<file path=ppt/slides/slide13.xml><?xml version="1.0" encoding="utf-8"?>
+<p:sld xmlns:a="http://schemas.openxmlformats.org/drawingml/2006/main" xmlns:r="http://schemas.openxmlformats.org/officeDocument/2006/relationships" xmlns:p="http://schemas.openxmlformats.org/presentationml/2006/main">
+  <p:cSld>
+    <p:spTree>
+      <p:nvGrpSpPr>
+        <p:cNvPr id="1" name="">
+          <a:extLst>
+            <a:ext uri="{FF2B5EF4-FFF2-40B4-BE49-F238E27FC236}">
+              <a16:creationId xmlns:a16="http://schemas.microsoft.com/office/drawing/2014/main" id="{5736D757-DAD2-BAA7-1BB5-4A7B9B4B2050}"/>
+            </a:ext>
+          </a:extLst>
+        </p:cNvPr>
+        <p:cNvGrpSpPr/>
+        <p:nvPr/>
+      </p:nvGrpSpPr>
+      <p:grpSpPr>
+        <a:xfrm>
+          <a:off x="0" y="0"/>
+          <a:ext cx="0" cy="0"/>
+          <a:chOff x="0" y="0"/>
+          <a:chExt cx="0" cy="0"/>
+        </a:xfrm>
+      </p:grpSpPr>
+      <p:sp>
+        <p:nvSpPr>
+          <p:cNvPr id="2" name="Title 1">
+            <a:extLst>
+              <a:ext uri="{FF2B5EF4-FFF2-40B4-BE49-F238E27FC236}">
+                <a16:creationId xmlns:a16="http://schemas.microsoft.com/office/drawing/2014/main" id="{91B5A878-B1DF-16D1-207E-473BD1ECC72C}"/>
+              </a:ext>
+            </a:extLst>
+          </p:cNvPr>
+          <p:cNvSpPr>
+            <a:spLocks noGrp="1"/>
+          </p:cNvSpPr>
+          <p:nvPr>
+            <p:ph type="title"/>
+          </p:nvPr>
+        </p:nvSpPr>
+        <p:spPr/>
+        <p:txBody>
+          <a:bodyPr/>
+          <a:lstStyle/>
+          <a:p>
+            <a:r>
+              <a:rPr lang="en-US" dirty="0"/>
+              <a:t>While loop – third run</a:t>
+            </a:r>
+          </a:p>
+        </p:txBody>
+      </p:sp>
+      <p:graphicFrame>
+        <p:nvGraphicFramePr>
+          <p:cNvPr id="4" name="Content Placeholder 3">
+            <a:extLst>
+              <a:ext uri="{FF2B5EF4-FFF2-40B4-BE49-F238E27FC236}">
+                <a16:creationId xmlns:a16="http://schemas.microsoft.com/office/drawing/2014/main" id="{1C7DFAFA-C80E-50A3-F513-C1BF3360CBD5}"/>
+              </a:ext>
+            </a:extLst>
+          </p:cNvPr>
+          <p:cNvGraphicFramePr>
+            <a:graphicFrameLocks noGrp="1"/>
+          </p:cNvGraphicFramePr>
+          <p:nvPr>
+            <p:ph idx="1"/>
+            <p:extLst>
+              <p:ext uri="{D42A27DB-BD31-4B8C-83A1-F6EECF244321}">
+                <p14:modId xmlns:p14="http://schemas.microsoft.com/office/powerpoint/2010/main" val="442104016"/>
+              </p:ext>
+            </p:extLst>
+          </p:nvPr>
+        </p:nvGraphicFramePr>
+        <p:xfrm>
+          <a:off x="685800" y="2141538"/>
+          <a:ext cx="10131425" cy="1280160"/>
+        </p:xfrm>
+        <a:graphic>
+          <a:graphicData uri="http://schemas.openxmlformats.org/drawingml/2006/table">
+            <a:tbl>
+              <a:tblPr firstRow="1" bandRow="1">
+                <a:tableStyleId>{5C22544A-7EE6-4342-B048-85BDC9FD1C3A}</a:tableStyleId>
+              </a:tblPr>
+              <a:tblGrid>
+                <a:gridCol w="2026285">
+                  <a:extLst>
+                    <a:ext uri="{9D8B030D-6E8A-4147-A177-3AD203B41FA5}">
+                      <a16:colId xmlns:a16="http://schemas.microsoft.com/office/drawing/2014/main" val="94462144"/>
+                    </a:ext>
+                  </a:extLst>
+                </a:gridCol>
+                <a:gridCol w="2026285">
+                  <a:extLst>
+                    <a:ext uri="{9D8B030D-6E8A-4147-A177-3AD203B41FA5}">
+                      <a16:colId xmlns:a16="http://schemas.microsoft.com/office/drawing/2014/main" val="1467820159"/>
+                    </a:ext>
+                  </a:extLst>
+                </a:gridCol>
+                <a:gridCol w="2026285">
+                  <a:extLst>
+                    <a:ext uri="{9D8B030D-6E8A-4147-A177-3AD203B41FA5}">
+                      <a16:colId xmlns:a16="http://schemas.microsoft.com/office/drawing/2014/main" val="744455756"/>
+                    </a:ext>
+                  </a:extLst>
+                </a:gridCol>
+                <a:gridCol w="2026285">
+                  <a:extLst>
+                    <a:ext uri="{9D8B030D-6E8A-4147-A177-3AD203B41FA5}">
+                      <a16:colId xmlns:a16="http://schemas.microsoft.com/office/drawing/2014/main" val="1444762233"/>
+                    </a:ext>
+                  </a:extLst>
+                </a:gridCol>
+                <a:gridCol w="2026285">
+                  <a:extLst>
+                    <a:ext uri="{9D8B030D-6E8A-4147-A177-3AD203B41FA5}">
+                      <a16:colId xmlns:a16="http://schemas.microsoft.com/office/drawing/2014/main" val="27683706"/>
+                    </a:ext>
+                  </a:extLst>
+                </a:gridCol>
+              </a:tblGrid>
+              <a:tr h="370840">
+                <a:tc>
+                  <a:txBody>
+                    <a:bodyPr/>
+                    <a:lstStyle/>
+                    <a:p>
+                      <a:r>
+                        <a:rPr lang="en-US" dirty="0"/>
+                        <a:t>Prompt</a:t>
+                      </a:r>
+                    </a:p>
+                  </a:txBody>
+                  <a:tcPr/>
+                </a:tc>
+                <a:tc>
+                  <a:txBody>
+                    <a:bodyPr/>
+                    <a:lstStyle/>
+                    <a:p>
+                      <a:r>
+                        <a:rPr lang="en-US" dirty="0"/>
+                        <a:t>Value of letter</a:t>
+                      </a:r>
+                    </a:p>
+                  </a:txBody>
+                  <a:tcPr/>
+                </a:tc>
+                <a:tc>
+                  <a:txBody>
+                    <a:bodyPr/>
+                    <a:lstStyle/>
+                    <a:p>
+                      <a:r>
+                        <a:rPr lang="en-US" dirty="0"/>
+                        <a:t>Is condition met?</a:t>
+                      </a:r>
+                    </a:p>
+                    <a:p>
+                      <a:r>
+                        <a:rPr lang="en-US" dirty="0"/>
+                        <a:t>(letter !== “p”)</a:t>
+                      </a:r>
+                    </a:p>
+                  </a:txBody>
+                  <a:tcPr/>
+                </a:tc>
+                <a:tc>
+                  <a:txBody>
+                    <a:bodyPr/>
+                    <a:lstStyle/>
+                    <a:p>
+                      <a:r>
+                        <a:rPr lang="en-US" dirty="0"/>
+                        <a:t>Execute loop body?</a:t>
+                      </a:r>
+                    </a:p>
+                  </a:txBody>
+                  <a:tcPr/>
+                </a:tc>
+                <a:tc>
+                  <a:txBody>
+                    <a:bodyPr/>
+                    <a:lstStyle/>
+                    <a:p>
+                      <a:r>
+                        <a:rPr lang="en-US" dirty="0"/>
+                        <a:t>Alert</a:t>
+                      </a:r>
+                    </a:p>
+                  </a:txBody>
+                  <a:tcPr/>
+                </a:tc>
+                <a:extLst>
+                  <a:ext uri="{0D108BD9-81ED-4DB2-BD59-A6C34878D82A}">
+                    <a16:rowId xmlns:a16="http://schemas.microsoft.com/office/drawing/2014/main" val="2966389548"/>
+                  </a:ext>
+                </a:extLst>
+              </a:tr>
+              <a:tr h="370840">
+                <a:tc>
+                  <a:txBody>
+                    <a:bodyPr/>
+                    <a:lstStyle/>
+                    <a:p>
+                      <a:r>
+                        <a:rPr lang="en-US" dirty="0"/>
+                        <a:t>“Type the letter ‘p’”</a:t>
+                      </a:r>
+                    </a:p>
+                  </a:txBody>
+                  <a:tcPr/>
+                </a:tc>
+                <a:tc>
+                  <a:txBody>
+                    <a:bodyPr/>
+                    <a:lstStyle/>
+                    <a:p>
+                      <a:r>
+                        <a:rPr lang="en-US" dirty="0"/>
+                        <a:t>“p”</a:t>
+                      </a:r>
+                    </a:p>
+                  </a:txBody>
+                  <a:tcPr/>
+                </a:tc>
+                <a:tc>
+                  <a:txBody>
+                    <a:bodyPr/>
+                    <a:lstStyle/>
+                    <a:p>
+                      <a:r>
+                        <a:rPr lang="en-US" dirty="0"/>
+                        <a:t>false</a:t>
+                      </a:r>
+                    </a:p>
+                  </a:txBody>
+                  <a:tcPr/>
+                </a:tc>
+                <a:tc>
+                  <a:txBody>
+                    <a:bodyPr/>
+                    <a:lstStyle/>
+                    <a:p>
+                      <a:r>
+                        <a:rPr lang="en-US" dirty="0"/>
+                        <a:t>No</a:t>
+                      </a:r>
+                    </a:p>
+                  </a:txBody>
+                  <a:tcPr/>
+                </a:tc>
+                <a:tc>
+                  <a:txBody>
+                    <a:bodyPr/>
+                    <a:lstStyle/>
+                    <a:p>
+                      <a:r>
+                        <a:rPr lang="en-US" dirty="0"/>
+                        <a:t>“Good job!”</a:t>
+                      </a:r>
+                    </a:p>
+                  </a:txBody>
+                  <a:tcPr/>
+                </a:tc>
+                <a:extLst>
+                  <a:ext uri="{0D108BD9-81ED-4DB2-BD59-A6C34878D82A}">
+                    <a16:rowId xmlns:a16="http://schemas.microsoft.com/office/drawing/2014/main" val="2467284032"/>
+                  </a:ext>
+                </a:extLst>
+              </a:tr>
+            </a:tbl>
+          </a:graphicData>
+        </a:graphic>
+      </p:graphicFrame>
+    </p:spTree>
+    <p:extLst>
+      <p:ext uri="{BB962C8B-B14F-4D97-AF65-F5344CB8AC3E}">
+        <p14:creationId xmlns:p14="http://schemas.microsoft.com/office/powerpoint/2010/main" val="3351674135"/>
+      </p:ext>
+    </p:extLst>
+  </p:cSld>
+  <p:clrMapOvr>
+    <a:masterClrMapping/>
+  </p:clrMapOvr>
+</p:sld>
+</file>
+
+<file path=ppt/slides/slide14.xml><?xml version="1.0" encoding="utf-8"?>
+<p:sld xmlns:a="http://schemas.openxmlformats.org/drawingml/2006/main" xmlns:r="http://schemas.openxmlformats.org/officeDocument/2006/relationships" xmlns:p="http://schemas.openxmlformats.org/presentationml/2006/main">
+  <p:cSld>
+    <p:spTree>
+      <p:nvGrpSpPr>
+        <p:cNvPr id="1" name=""/>
+        <p:cNvGrpSpPr/>
+        <p:nvPr/>
+      </p:nvGrpSpPr>
+      <p:grpSpPr>
+        <a:xfrm>
+          <a:off x="0" y="0"/>
+          <a:ext cx="0" cy="0"/>
+          <a:chOff x="0" y="0"/>
+          <a:chExt cx="0" cy="0"/>
+        </a:xfrm>
+      </p:grpSpPr>
+      <p:sp>
+        <p:nvSpPr>
+          <p:cNvPr id="2" name="Title 1">
+            <a:extLst>
+              <a:ext uri="{FF2B5EF4-FFF2-40B4-BE49-F238E27FC236}">
+                <a16:creationId xmlns:a16="http://schemas.microsoft.com/office/drawing/2014/main" id="{C398280E-C47E-5AC8-732A-F7979598407B}"/>
+              </a:ext>
+            </a:extLst>
+          </p:cNvPr>
+          <p:cNvSpPr>
+            <a:spLocks noGrp="1"/>
+          </p:cNvSpPr>
+          <p:nvPr>
+            <p:ph type="title"/>
+          </p:nvPr>
+        </p:nvSpPr>
+        <p:spPr/>
+        <p:txBody>
+          <a:bodyPr/>
+          <a:lstStyle/>
+          <a:p>
+            <a:r>
+              <a:rPr lang="en-US" dirty="0"/>
+              <a:t>Do-while loop</a:t>
+            </a:r>
+          </a:p>
+        </p:txBody>
+      </p:sp>
+      <p:sp>
+        <p:nvSpPr>
+          <p:cNvPr id="3" name="Content Placeholder 2">
+            <a:extLst>
+              <a:ext uri="{FF2B5EF4-FFF2-40B4-BE49-F238E27FC236}">
+                <a16:creationId xmlns:a16="http://schemas.microsoft.com/office/drawing/2014/main" id="{E7FD4A05-F298-F681-609E-EBE5AF13EEAE}"/>
+              </a:ext>
+            </a:extLst>
+          </p:cNvPr>
+          <p:cNvSpPr>
+            <a:spLocks noGrp="1"/>
+          </p:cNvSpPr>
+          <p:nvPr>
+            <p:ph idx="1"/>
+          </p:nvPr>
+        </p:nvSpPr>
+        <p:spPr/>
+        <p:txBody>
+          <a:bodyPr>
+            <a:normAutofit/>
+          </a:bodyPr>
+          <a:lstStyle/>
+          <a:p>
+            <a:r>
+              <a:rPr lang="en-US" sz="2400" dirty="0"/>
+              <a:t>Like while loops, do-while loops use a condition to check whether a loop should continue</a:t>
+            </a:r>
+          </a:p>
+          <a:p>
+            <a:r>
+              <a:rPr lang="en-US" sz="2400" dirty="0"/>
+              <a:t>Like while loops, do-while loops are generally used when you don’t know how many iterations of the loop will occur</a:t>
+            </a:r>
+          </a:p>
+          <a:p>
+            <a:r>
+              <a:rPr lang="en-US" sz="2400" dirty="0"/>
+              <a:t>do-while loops check the condition at the end of the loop</a:t>
+            </a:r>
+          </a:p>
+          <a:p>
+            <a:endParaRPr lang="en-US" sz="2400" dirty="0"/>
+          </a:p>
+        </p:txBody>
+      </p:sp>
+    </p:spTree>
+    <p:extLst>
+      <p:ext uri="{BB962C8B-B14F-4D97-AF65-F5344CB8AC3E}">
+        <p14:creationId xmlns:p14="http://schemas.microsoft.com/office/powerpoint/2010/main" val="172174443"/>
+      </p:ext>
+    </p:extLst>
+  </p:cSld>
+  <p:clrMapOvr>
+    <a:masterClrMapping/>
+  </p:clrMapOvr>
+</p:sld>
+</file>
+
+<file path=ppt/slides/slide15.xml><?xml version="1.0" encoding="utf-8"?>
+<p:sld xmlns:a="http://schemas.openxmlformats.org/drawingml/2006/main" xmlns:r="http://schemas.openxmlformats.org/officeDocument/2006/relationships" xmlns:p="http://schemas.openxmlformats.org/presentationml/2006/main">
+  <p:cSld>
+    <p:spTree>
+      <p:nvGrpSpPr>
+        <p:cNvPr id="1" name=""/>
+        <p:cNvGrpSpPr/>
+        <p:nvPr/>
+      </p:nvGrpSpPr>
+      <p:grpSpPr>
+        <a:xfrm>
+          <a:off x="0" y="0"/>
+          <a:ext cx="0" cy="0"/>
+          <a:chOff x="0" y="0"/>
+          <a:chExt cx="0" cy="0"/>
+        </a:xfrm>
+      </p:grpSpPr>
+      <p:pic>
+        <p:nvPicPr>
+          <p:cNvPr id="3" name="Picture 2">
+            <a:extLst>
+              <a:ext uri="{FF2B5EF4-FFF2-40B4-BE49-F238E27FC236}">
+                <a16:creationId xmlns:a16="http://schemas.microsoft.com/office/drawing/2014/main" id="{996C20B7-8406-12E8-9864-D2F3369C33FB}"/>
+              </a:ext>
+            </a:extLst>
+          </p:cNvPr>
+          <p:cNvPicPr>
+            <a:picLocks noChangeAspect="1"/>
+          </p:cNvPicPr>
+          <p:nvPr/>
+        </p:nvPicPr>
+        <p:blipFill>
+          <a:blip r:embed="rId2"/>
+          <a:stretch>
+            <a:fillRect/>
+          </a:stretch>
+        </p:blipFill>
+        <p:spPr>
+          <a:xfrm>
+            <a:off x="1203608" y="2819400"/>
+            <a:ext cx="3556000" cy="1219200"/>
+          </a:xfrm>
+          <a:prstGeom prst="rect">
+            <a:avLst/>
+          </a:prstGeom>
+        </p:spPr>
+      </p:pic>
+      <p:pic>
+        <p:nvPicPr>
+          <p:cNvPr id="5" name="Picture 4">
+            <a:extLst>
+              <a:ext uri="{FF2B5EF4-FFF2-40B4-BE49-F238E27FC236}">
+                <a16:creationId xmlns:a16="http://schemas.microsoft.com/office/drawing/2014/main" id="{7CCB0C4E-3C5B-F976-FBC2-0BD2368B6E7A}"/>
+              </a:ext>
+            </a:extLst>
+          </p:cNvPr>
+          <p:cNvPicPr>
+            <a:picLocks noChangeAspect="1"/>
+          </p:cNvPicPr>
+          <p:nvPr/>
+        </p:nvPicPr>
+        <p:blipFill>
+          <a:blip r:embed="rId3"/>
+          <a:stretch>
+            <a:fillRect/>
+          </a:stretch>
+        </p:blipFill>
+        <p:spPr>
+          <a:xfrm>
+            <a:off x="7859899" y="530759"/>
+            <a:ext cx="2530210" cy="5796481"/>
+          </a:xfrm>
+          <a:prstGeom prst="rect">
+            <a:avLst/>
+          </a:prstGeom>
+        </p:spPr>
+      </p:pic>
+    </p:spTree>
+    <p:extLst>
+      <p:ext uri="{BB962C8B-B14F-4D97-AF65-F5344CB8AC3E}">
+        <p14:creationId xmlns:p14="http://schemas.microsoft.com/office/powerpoint/2010/main" val="1400364449"/>
+      </p:ext>
+    </p:extLst>
+  </p:cSld>
+  <p:clrMapOvr>
+    <a:masterClrMapping/>
+  </p:clrMapOvr>
+</p:sld>
+</file>
+
+<file path=ppt/slides/slide16.xml><?xml version="1.0" encoding="utf-8"?>
+<p:sld xmlns:a="http://schemas.openxmlformats.org/drawingml/2006/main" xmlns:r="http://schemas.openxmlformats.org/officeDocument/2006/relationships" xmlns:p="http://schemas.openxmlformats.org/presentationml/2006/main">
+  <p:cSld>
+    <p:spTree>
+      <p:nvGrpSpPr>
+        <p:cNvPr id="1" name=""/>
+        <p:cNvGrpSpPr/>
+        <p:nvPr/>
+      </p:nvGrpSpPr>
+      <p:grpSpPr>
+        <a:xfrm>
+          <a:off x="0" y="0"/>
+          <a:ext cx="0" cy="0"/>
+          <a:chOff x="0" y="0"/>
+          <a:chExt cx="0" cy="0"/>
+        </a:xfrm>
+      </p:grpSpPr>
+      <p:pic>
+        <p:nvPicPr>
+          <p:cNvPr id="3" name="Picture 2">
+            <a:extLst>
+              <a:ext uri="{FF2B5EF4-FFF2-40B4-BE49-F238E27FC236}">
+                <a16:creationId xmlns:a16="http://schemas.microsoft.com/office/drawing/2014/main" id="{176B23C9-9516-1EA5-BB15-6278394AEB06}"/>
+              </a:ext>
+            </a:extLst>
+          </p:cNvPr>
+          <p:cNvPicPr>
+            <a:picLocks noChangeAspect="1"/>
+          </p:cNvPicPr>
+          <p:nvPr/>
+        </p:nvPicPr>
+        <p:blipFill>
+          <a:blip r:embed="rId2"/>
+          <a:stretch>
+            <a:fillRect/>
+          </a:stretch>
+        </p:blipFill>
+        <p:spPr>
+          <a:xfrm>
+            <a:off x="4184650" y="2660650"/>
+            <a:ext cx="3822700" cy="1536700"/>
+          </a:xfrm>
+          <a:prstGeom prst="rect">
+            <a:avLst/>
+          </a:prstGeom>
+        </p:spPr>
+      </p:pic>
+    </p:spTree>
+    <p:extLst>
+      <p:ext uri="{BB962C8B-B14F-4D97-AF65-F5344CB8AC3E}">
+        <p14:creationId xmlns:p14="http://schemas.microsoft.com/office/powerpoint/2010/main" val="520346254"/>
+      </p:ext>
+    </p:extLst>
+  </p:cSld>
+  <p:clrMapOvr>
+    <a:masterClrMapping/>
+  </p:clrMapOvr>
+</p:sld>
+</file>
+
+<file path=ppt/slides/slide17.xml><?xml version="1.0" encoding="utf-8"?>
+<p:sld xmlns:a="http://schemas.openxmlformats.org/drawingml/2006/main" xmlns:r="http://schemas.openxmlformats.org/officeDocument/2006/relationships" xmlns:p="http://schemas.openxmlformats.org/presentationml/2006/main">
+  <p:cSld>
+    <p:spTree>
+      <p:nvGrpSpPr>
+        <p:cNvPr id="1" name=""/>
+        <p:cNvGrpSpPr/>
+        <p:nvPr/>
+      </p:nvGrpSpPr>
+      <p:grpSpPr>
+        <a:xfrm>
+          <a:off x="0" y="0"/>
+          <a:ext cx="0" cy="0"/>
+          <a:chOff x="0" y="0"/>
+          <a:chExt cx="0" cy="0"/>
+        </a:xfrm>
+      </p:grpSpPr>
+      <p:graphicFrame>
+        <p:nvGraphicFramePr>
+          <p:cNvPr id="2" name="Table 1">
+            <a:extLst>
+              <a:ext uri="{FF2B5EF4-FFF2-40B4-BE49-F238E27FC236}">
+                <a16:creationId xmlns:a16="http://schemas.microsoft.com/office/drawing/2014/main" id="{3F55357B-3A56-407A-0C02-2954BC79B222}"/>
+              </a:ext>
+            </a:extLst>
+          </p:cNvPr>
+          <p:cNvGraphicFramePr>
+            <a:graphicFrameLocks noGrp="1"/>
+          </p:cNvGraphicFramePr>
+          <p:nvPr>
+            <p:extLst>
+              <p:ext uri="{D42A27DB-BD31-4B8C-83A1-F6EECF244321}">
+                <p14:modId xmlns:p14="http://schemas.microsoft.com/office/powerpoint/2010/main" val="2324294456"/>
+              </p:ext>
+            </p:extLst>
+          </p:nvPr>
+        </p:nvGraphicFramePr>
+        <p:xfrm>
+          <a:off x="1991762" y="1575292"/>
+          <a:ext cx="8168240" cy="3850000"/>
+        </p:xfrm>
+        <a:graphic>
+          <a:graphicData uri="http://schemas.openxmlformats.org/drawingml/2006/table">
+            <a:tbl>
+              <a:tblPr firstRow="1" bandRow="1">
+                <a:tableStyleId>{5C22544A-7EE6-4342-B048-85BDC9FD1C3A}</a:tableStyleId>
+              </a:tblPr>
+              <a:tblGrid>
+                <a:gridCol w="1633648">
+                  <a:extLst>
+                    <a:ext uri="{9D8B030D-6E8A-4147-A177-3AD203B41FA5}">
+                      <a16:colId xmlns:a16="http://schemas.microsoft.com/office/drawing/2014/main" val="3133559732"/>
+                    </a:ext>
+                  </a:extLst>
+                </a:gridCol>
+                <a:gridCol w="1633648">
+                  <a:extLst>
+                    <a:ext uri="{9D8B030D-6E8A-4147-A177-3AD203B41FA5}">
+                      <a16:colId xmlns:a16="http://schemas.microsoft.com/office/drawing/2014/main" val="3268746413"/>
+                    </a:ext>
+                  </a:extLst>
+                </a:gridCol>
+                <a:gridCol w="1633648">
+                  <a:extLst>
+                    <a:ext uri="{9D8B030D-6E8A-4147-A177-3AD203B41FA5}">
+                      <a16:colId xmlns:a16="http://schemas.microsoft.com/office/drawing/2014/main" val="2210851856"/>
+                    </a:ext>
+                  </a:extLst>
+                </a:gridCol>
+                <a:gridCol w="1633648">
+                  <a:extLst>
+                    <a:ext uri="{9D8B030D-6E8A-4147-A177-3AD203B41FA5}">
+                      <a16:colId xmlns:a16="http://schemas.microsoft.com/office/drawing/2014/main" val="3358649592"/>
+                    </a:ext>
+                  </a:extLst>
+                </a:gridCol>
+                <a:gridCol w="1633648">
+                  <a:extLst>
+                    <a:ext uri="{9D8B030D-6E8A-4147-A177-3AD203B41FA5}">
+                      <a16:colId xmlns:a16="http://schemas.microsoft.com/office/drawing/2014/main" val="671692397"/>
+                    </a:ext>
+                  </a:extLst>
+                </a:gridCol>
+              </a:tblGrid>
+              <a:tr h="915456">
+                <a:tc>
+                  <a:txBody>
+                    <a:bodyPr/>
+                    <a:lstStyle/>
+                    <a:p>
+                      <a:r>
+                        <a:rPr lang="en-US" dirty="0"/>
+                        <a:t>Execute loop body?</a:t>
+                      </a:r>
+                    </a:p>
+                  </a:txBody>
+                  <a:tcPr/>
+                </a:tc>
+                <a:tc>
+                  <a:txBody>
+                    <a:bodyPr/>
+                    <a:lstStyle/>
+                    <a:p>
+                      <a:r>
+                        <a:rPr lang="en-US" dirty="0"/>
+                        <a:t>Prompt</a:t>
+                      </a:r>
+                    </a:p>
+                  </a:txBody>
+                  <a:tcPr/>
+                </a:tc>
+                <a:tc>
+                  <a:txBody>
+                    <a:bodyPr/>
+                    <a:lstStyle/>
+                    <a:p>
+                      <a:r>
+                        <a:rPr lang="en-US" dirty="0"/>
+                        <a:t>Value of letter</a:t>
+                      </a:r>
+                    </a:p>
+                  </a:txBody>
+                  <a:tcPr/>
+                </a:tc>
+                <a:tc>
+                  <a:txBody>
+                    <a:bodyPr/>
+                    <a:lstStyle/>
+                    <a:p>
+                      <a:r>
+                        <a:rPr lang="en-US" dirty="0"/>
+                        <a:t>Is condition met? </a:t>
+                      </a:r>
+                    </a:p>
+                    <a:p>
+                      <a:r>
+                        <a:rPr lang="en-US" dirty="0"/>
+                        <a:t>(letter !== “s”)</a:t>
+                      </a:r>
+                    </a:p>
+                  </a:txBody>
+                  <a:tcPr/>
+                </a:tc>
+                <a:tc>
+                  <a:txBody>
+                    <a:bodyPr/>
+                    <a:lstStyle/>
+                    <a:p>
+                      <a:r>
+                        <a:rPr lang="en-US" dirty="0"/>
+                        <a:t>Alert</a:t>
+                      </a:r>
+                    </a:p>
+                  </a:txBody>
+                  <a:tcPr/>
+                </a:tc>
+                <a:extLst>
+                  <a:ext uri="{0D108BD9-81ED-4DB2-BD59-A6C34878D82A}">
+                    <a16:rowId xmlns:a16="http://schemas.microsoft.com/office/drawing/2014/main" val="3925409887"/>
+                  </a:ext>
+                </a:extLst>
+              </a:tr>
+              <a:tr h="640819">
+                <a:tc>
+                  <a:txBody>
+                    <a:bodyPr/>
+                    <a:lstStyle/>
+                    <a:p>
+                      <a:r>
+                        <a:rPr lang="en-US" dirty="0"/>
+                        <a:t>Yes</a:t>
+                      </a:r>
+                    </a:p>
+                  </a:txBody>
+                  <a:tcPr/>
+                </a:tc>
+                <a:tc>
+                  <a:txBody>
+                    <a:bodyPr/>
+                    <a:lstStyle/>
+                    <a:p>
+                      <a:r>
+                        <a:rPr lang="en-US" dirty="0"/>
+                        <a:t>“Enter the letter ‘s’”</a:t>
+                      </a:r>
+                    </a:p>
+                  </a:txBody>
+                  <a:tcPr/>
+                </a:tc>
+                <a:tc>
+                  <a:txBody>
+                    <a:bodyPr/>
+                    <a:lstStyle/>
+                    <a:p>
+                      <a:r>
+                        <a:rPr lang="en-US" dirty="0"/>
+                        <a:t>“p”</a:t>
+                      </a:r>
+                    </a:p>
+                  </a:txBody>
+                  <a:tcPr/>
+                </a:tc>
+                <a:tc>
+                  <a:txBody>
+                    <a:bodyPr/>
+                    <a:lstStyle/>
+                    <a:p>
+                      <a:r>
+                        <a:rPr lang="en-US" dirty="0"/>
+                        <a:t>true</a:t>
+                      </a:r>
+                    </a:p>
+                  </a:txBody>
+                  <a:tcPr/>
+                </a:tc>
+                <a:tc>
+                  <a:txBody>
+                    <a:bodyPr/>
+                    <a:lstStyle/>
+                    <a:p>
+                      <a:endParaRPr lang="en-US"/>
+                    </a:p>
+                  </a:txBody>
+                  <a:tcPr/>
+                </a:tc>
+                <a:extLst>
+                  <a:ext uri="{0D108BD9-81ED-4DB2-BD59-A6C34878D82A}">
+                    <a16:rowId xmlns:a16="http://schemas.microsoft.com/office/drawing/2014/main" val="2179986251"/>
+                  </a:ext>
+                </a:extLst>
+              </a:tr>
+              <a:tr h="640819">
+                <a:tc>
+                  <a:txBody>
+                    <a:bodyPr/>
+                    <a:lstStyle/>
+                    <a:p>
+                      <a:r>
+                        <a:rPr lang="en-US" dirty="0"/>
+                        <a:t>Yes</a:t>
+                      </a:r>
+                    </a:p>
+                  </a:txBody>
+                  <a:tcPr/>
+                </a:tc>
+                <a:tc>
+                  <a:txBody>
+                    <a:bodyPr/>
+                    <a:lstStyle/>
+                    <a:p>
+                      <a:r>
+                        <a:rPr lang="en-US" dirty="0"/>
+                        <a:t>“Enter the letter ‘s’”</a:t>
+                      </a:r>
+                    </a:p>
+                  </a:txBody>
+                  <a:tcPr/>
+                </a:tc>
+                <a:tc>
+                  <a:txBody>
+                    <a:bodyPr/>
+                    <a:lstStyle/>
+                    <a:p>
+                      <a:r>
+                        <a:rPr lang="en-US" dirty="0"/>
+                        <a:t>“r”</a:t>
+                      </a:r>
+                    </a:p>
+                  </a:txBody>
+                  <a:tcPr/>
+                </a:tc>
+                <a:tc>
+                  <a:txBody>
+                    <a:bodyPr/>
+                    <a:lstStyle/>
+                    <a:p>
+                      <a:r>
+                        <a:rPr lang="en-US" dirty="0"/>
+                        <a:t>true</a:t>
+                      </a:r>
+                    </a:p>
+                  </a:txBody>
+                  <a:tcPr/>
+                </a:tc>
+                <a:tc>
+                  <a:txBody>
+                    <a:bodyPr/>
+                    <a:lstStyle/>
+                    <a:p>
+                      <a:endParaRPr lang="en-US"/>
+                    </a:p>
+                  </a:txBody>
+                  <a:tcPr/>
+                </a:tc>
+                <a:extLst>
+                  <a:ext uri="{0D108BD9-81ED-4DB2-BD59-A6C34878D82A}">
+                    <a16:rowId xmlns:a16="http://schemas.microsoft.com/office/drawing/2014/main" val="3612549066"/>
+                  </a:ext>
+                </a:extLst>
+              </a:tr>
+              <a:tr h="640819">
+                <a:tc>
+                  <a:txBody>
+                    <a:bodyPr/>
+                    <a:lstStyle/>
+                    <a:p>
+                      <a:r>
+                        <a:rPr lang="en-US" dirty="0"/>
+                        <a:t>Yes</a:t>
+                      </a:r>
+                    </a:p>
+                  </a:txBody>
+                  <a:tcPr/>
+                </a:tc>
+                <a:tc>
+                  <a:txBody>
+                    <a:bodyPr/>
+                    <a:lstStyle/>
+                    <a:p>
+                      <a:r>
+                        <a:rPr lang="en-US" dirty="0"/>
+                        <a:t>“Enter the letter ‘s’”</a:t>
+                      </a:r>
+                    </a:p>
+                  </a:txBody>
+                  <a:tcPr/>
+                </a:tc>
+                <a:tc>
+                  <a:txBody>
+                    <a:bodyPr/>
+                    <a:lstStyle/>
+                    <a:p>
+                      <a:r>
+                        <a:rPr lang="en-US" dirty="0"/>
+                        <a:t>“6”</a:t>
+                      </a:r>
+                    </a:p>
+                  </a:txBody>
+                  <a:tcPr/>
+                </a:tc>
+                <a:tc>
+                  <a:txBody>
+                    <a:bodyPr/>
+                    <a:lstStyle/>
+                    <a:p>
+                      <a:r>
+                        <a:rPr lang="en-US" dirty="0"/>
+                        <a:t>true</a:t>
+                      </a:r>
+                    </a:p>
+                  </a:txBody>
+                  <a:tcPr/>
+                </a:tc>
+                <a:tc>
+                  <a:txBody>
+                    <a:bodyPr/>
+                    <a:lstStyle/>
+                    <a:p>
+                      <a:endParaRPr lang="en-US"/>
+                    </a:p>
+                  </a:txBody>
+                  <a:tcPr/>
+                </a:tc>
+                <a:extLst>
+                  <a:ext uri="{0D108BD9-81ED-4DB2-BD59-A6C34878D82A}">
+                    <a16:rowId xmlns:a16="http://schemas.microsoft.com/office/drawing/2014/main" val="594620270"/>
+                  </a:ext>
+                </a:extLst>
+              </a:tr>
+              <a:tr h="640819">
+                <a:tc>
+                  <a:txBody>
+                    <a:bodyPr/>
+                    <a:lstStyle/>
+                    <a:p>
+                      <a:r>
+                        <a:rPr lang="en-US" dirty="0"/>
+                        <a:t>Yes</a:t>
+                      </a:r>
+                    </a:p>
+                  </a:txBody>
+                  <a:tcPr/>
+                </a:tc>
+                <a:tc>
+                  <a:txBody>
+                    <a:bodyPr/>
+                    <a:lstStyle/>
+                    <a:p>
+                      <a:r>
+                        <a:rPr lang="en-US" dirty="0"/>
+                        <a:t>“Enter the letter ‘s’”</a:t>
+                      </a:r>
+                    </a:p>
+                  </a:txBody>
+                  <a:tcPr/>
+                </a:tc>
+                <a:tc>
+                  <a:txBody>
+                    <a:bodyPr/>
+                    <a:lstStyle/>
+                    <a:p>
+                      <a:r>
+                        <a:rPr lang="en-US" dirty="0"/>
+                        <a:t>“s”</a:t>
+                      </a:r>
+                    </a:p>
+                  </a:txBody>
+                  <a:tcPr/>
+                </a:tc>
+                <a:tc>
+                  <a:txBody>
+                    <a:bodyPr/>
+                    <a:lstStyle/>
+                    <a:p>
+                      <a:r>
+                        <a:rPr lang="en-US" dirty="0"/>
+                        <a:t>false</a:t>
+                      </a:r>
+                    </a:p>
+                  </a:txBody>
+                  <a:tcPr/>
+                </a:tc>
+                <a:tc>
+                  <a:txBody>
+                    <a:bodyPr/>
+                    <a:lstStyle/>
+                    <a:p>
+                      <a:r>
+                        <a:rPr lang="en-US" dirty="0"/>
+                        <a:t>“Good job!”</a:t>
+                      </a:r>
+                    </a:p>
+                  </a:txBody>
+                  <a:tcPr/>
+                </a:tc>
+                <a:extLst>
+                  <a:ext uri="{0D108BD9-81ED-4DB2-BD59-A6C34878D82A}">
+                    <a16:rowId xmlns:a16="http://schemas.microsoft.com/office/drawing/2014/main" val="2944535193"/>
+                  </a:ext>
+                </a:extLst>
+              </a:tr>
+              <a:tr h="371268">
+                <a:tc>
+                  <a:txBody>
+                    <a:bodyPr/>
+                    <a:lstStyle/>
+                    <a:p>
+                      <a:r>
+                        <a:rPr lang="en-US" dirty="0"/>
+                        <a:t>No</a:t>
+                      </a:r>
+                    </a:p>
+                  </a:txBody>
+                  <a:tcPr/>
+                </a:tc>
+                <a:tc>
+                  <a:txBody>
+                    <a:bodyPr/>
+                    <a:lstStyle/>
+                    <a:p>
+                      <a:endParaRPr lang="en-US" dirty="0"/>
+                    </a:p>
+                  </a:txBody>
+                  <a:tcPr/>
+                </a:tc>
+                <a:tc>
+                  <a:txBody>
+                    <a:bodyPr/>
+                    <a:lstStyle/>
+                    <a:p>
+                      <a:endParaRPr lang="en-US" dirty="0"/>
+                    </a:p>
+                  </a:txBody>
+                  <a:tcPr/>
+                </a:tc>
+                <a:tc>
+                  <a:txBody>
+                    <a:bodyPr/>
+                    <a:lstStyle/>
+                    <a:p>
+                      <a:endParaRPr lang="en-US" dirty="0"/>
+                    </a:p>
+                  </a:txBody>
+                  <a:tcPr/>
+                </a:tc>
+                <a:tc>
+                  <a:txBody>
+                    <a:bodyPr/>
+                    <a:lstStyle/>
+                    <a:p>
+                      <a:endParaRPr lang="en-US" dirty="0"/>
+                    </a:p>
+                  </a:txBody>
+                  <a:tcPr/>
+                </a:tc>
+                <a:extLst>
+                  <a:ext uri="{0D108BD9-81ED-4DB2-BD59-A6C34878D82A}">
+                    <a16:rowId xmlns:a16="http://schemas.microsoft.com/office/drawing/2014/main" val="1708763469"/>
+                  </a:ext>
+                </a:extLst>
+              </a:tr>
+            </a:tbl>
+          </a:graphicData>
+        </a:graphic>
+      </p:graphicFrame>
+    </p:spTree>
+    <p:extLst>
+      <p:ext uri="{BB962C8B-B14F-4D97-AF65-F5344CB8AC3E}">
+        <p14:creationId xmlns:p14="http://schemas.microsoft.com/office/powerpoint/2010/main" val="3784658730"/>
+      </p:ext>
+    </p:extLst>
+  </p:cSld>
+  <p:clrMapOvr>
+    <a:masterClrMapping/>
+  </p:clrMapOvr>
+</p:sld>
+</file>
+
+<file path=ppt/slides/slide18.xml><?xml version="1.0" encoding="utf-8"?>
+<p:sld xmlns:a="http://schemas.openxmlformats.org/drawingml/2006/main" xmlns:r="http://schemas.openxmlformats.org/officeDocument/2006/relationships" xmlns:p="http://schemas.openxmlformats.org/presentationml/2006/main">
+  <p:cSld>
+    <p:spTree>
+      <p:nvGrpSpPr>
+        <p:cNvPr id="1" name=""/>
+        <p:cNvGrpSpPr/>
+        <p:nvPr/>
+      </p:nvGrpSpPr>
+      <p:grpSpPr>
+        <a:xfrm>
+          <a:off x="0" y="0"/>
+          <a:ext cx="0" cy="0"/>
+          <a:chOff x="0" y="0"/>
+          <a:chExt cx="0" cy="0"/>
+        </a:xfrm>
+      </p:grpSpPr>
+      <p:sp>
+        <p:nvSpPr>
+          <p:cNvPr id="2" name="Title 1">
+            <a:extLst>
+              <a:ext uri="{FF2B5EF4-FFF2-40B4-BE49-F238E27FC236}">
+                <a16:creationId xmlns:a16="http://schemas.microsoft.com/office/drawing/2014/main" id="{6CF69DB1-DA4B-63B6-691A-1663D34BDEC6}"/>
+              </a:ext>
+            </a:extLst>
+          </p:cNvPr>
+          <p:cNvSpPr>
+            <a:spLocks noGrp="1"/>
+          </p:cNvSpPr>
+          <p:nvPr>
+            <p:ph type="title"/>
+          </p:nvPr>
+        </p:nvSpPr>
+        <p:spPr/>
+        <p:txBody>
+          <a:bodyPr/>
+          <a:lstStyle/>
+          <a:p>
+            <a:r>
+              <a:rPr lang="en-US" dirty="0"/>
+              <a:t>Difference between while loops and do-while loops</a:t>
+            </a:r>
+          </a:p>
+        </p:txBody>
+      </p:sp>
+      <p:sp>
+        <p:nvSpPr>
+          <p:cNvPr id="3" name="Content Placeholder 2">
+            <a:extLst>
+              <a:ext uri="{FF2B5EF4-FFF2-40B4-BE49-F238E27FC236}">
+                <a16:creationId xmlns:a16="http://schemas.microsoft.com/office/drawing/2014/main" id="{3398ED00-940E-5EB6-44EC-78EFA4F089D5}"/>
+              </a:ext>
+            </a:extLst>
+          </p:cNvPr>
+          <p:cNvSpPr>
+            <a:spLocks noGrp="1"/>
+          </p:cNvSpPr>
+          <p:nvPr>
+            <p:ph idx="1"/>
+          </p:nvPr>
+        </p:nvSpPr>
+        <p:spPr/>
+        <p:txBody>
+          <a:bodyPr>
+            <a:normAutofit/>
+          </a:bodyPr>
+          <a:lstStyle/>
+          <a:p>
+            <a:r>
+              <a:rPr lang="en-US" sz="2400" dirty="0"/>
+              <a:t>A while loop checks its condition at the beginning of the loop – if the condition is false to begin with, the loop won’t run</a:t>
+            </a:r>
+          </a:p>
+          <a:p>
+            <a:r>
+              <a:rPr lang="en-US" sz="2400" dirty="0"/>
+              <a:t>A do-while loop checks its condition at the end of the loop – the loop body is guaranteed to run at least once, even if the condition is false to begin with</a:t>
+            </a:r>
+          </a:p>
+        </p:txBody>
+      </p:sp>
+    </p:spTree>
+    <p:extLst>
+      <p:ext uri="{BB962C8B-B14F-4D97-AF65-F5344CB8AC3E}">
+        <p14:creationId xmlns:p14="http://schemas.microsoft.com/office/powerpoint/2010/main" val="3454981707"/>
+      </p:ext>
+    </p:extLst>
+  </p:cSld>
+  <p:clrMapOvr>
+    <a:masterClrMapping/>
+  </p:clrMapOvr>
+</p:sld>
+</file>
+
+<file path=ppt/slides/slide19.xml><?xml version="1.0" encoding="utf-8"?>
+<p:sld xmlns:a="http://schemas.openxmlformats.org/drawingml/2006/main" xmlns:r="http://schemas.openxmlformats.org/officeDocument/2006/relationships" xmlns:p="http://schemas.openxmlformats.org/presentationml/2006/main">
+  <p:cSld>
+    <p:spTree>
+      <p:nvGrpSpPr>
+        <p:cNvPr id="1" name=""/>
+        <p:cNvGrpSpPr/>
+        <p:nvPr/>
+      </p:nvGrpSpPr>
+      <p:grpSpPr>
+        <a:xfrm>
+          <a:off x="0" y="0"/>
+          <a:ext cx="0" cy="0"/>
+          <a:chOff x="0" y="0"/>
+          <a:chExt cx="0" cy="0"/>
+        </a:xfrm>
+      </p:grpSpPr>
+      <p:sp>
+        <p:nvSpPr>
+          <p:cNvPr id="2" name="Title 1">
+            <a:extLst>
+              <a:ext uri="{FF2B5EF4-FFF2-40B4-BE49-F238E27FC236}">
+                <a16:creationId xmlns:a16="http://schemas.microsoft.com/office/drawing/2014/main" id="{CF20A1BE-4511-66AB-E8B3-982CA9C4391A}"/>
+              </a:ext>
+            </a:extLst>
+          </p:cNvPr>
+          <p:cNvSpPr>
+            <a:spLocks noGrp="1"/>
+          </p:cNvSpPr>
+          <p:nvPr>
+            <p:ph type="title"/>
+          </p:nvPr>
+        </p:nvSpPr>
+        <p:spPr/>
+        <p:txBody>
+          <a:bodyPr/>
+          <a:lstStyle/>
+          <a:p>
+            <a:r>
+              <a:rPr lang="en-US" dirty="0"/>
+              <a:t>While loop vs do-while loop</a:t>
+            </a:r>
+          </a:p>
+        </p:txBody>
+      </p:sp>
+      <p:pic>
+        <p:nvPicPr>
+          <p:cNvPr id="14" name="Content Placeholder 13">
+            <a:extLst>
+              <a:ext uri="{FF2B5EF4-FFF2-40B4-BE49-F238E27FC236}">
+                <a16:creationId xmlns:a16="http://schemas.microsoft.com/office/drawing/2014/main" id="{8C7E705A-DB27-F89B-F574-1F64992CFE21}"/>
+              </a:ext>
+            </a:extLst>
+          </p:cNvPr>
+          <p:cNvPicPr>
+            <a:picLocks noGrp="1" noChangeAspect="1"/>
+          </p:cNvPicPr>
+          <p:nvPr>
+            <p:ph sz="half" idx="1"/>
+          </p:nvPr>
+        </p:nvPicPr>
+        <p:blipFill>
+          <a:blip r:embed="rId2"/>
+          <a:stretch>
+            <a:fillRect/>
+          </a:stretch>
+        </p:blipFill>
+        <p:spPr>
+          <a:xfrm>
+            <a:off x="1627981" y="3058319"/>
+            <a:ext cx="3111500" cy="1816100"/>
+          </a:xfrm>
+        </p:spPr>
+      </p:pic>
+      <p:pic>
+        <p:nvPicPr>
+          <p:cNvPr id="16" name="Content Placeholder 15">
+            <a:extLst>
+              <a:ext uri="{FF2B5EF4-FFF2-40B4-BE49-F238E27FC236}">
+                <a16:creationId xmlns:a16="http://schemas.microsoft.com/office/drawing/2014/main" id="{B346228F-CC37-A07D-4DF5-6382D13E78E7}"/>
+              </a:ext>
+            </a:extLst>
+          </p:cNvPr>
+          <p:cNvPicPr>
+            <a:picLocks noGrp="1" noChangeAspect="1"/>
+          </p:cNvPicPr>
+          <p:nvPr>
+            <p:ph sz="half" idx="2"/>
+          </p:nvPr>
+        </p:nvPicPr>
+        <p:blipFill>
+          <a:blip r:embed="rId3"/>
+          <a:stretch>
+            <a:fillRect/>
+          </a:stretch>
+        </p:blipFill>
+        <p:spPr>
+          <a:xfrm>
+            <a:off x="6795294" y="3051969"/>
+            <a:ext cx="3048000" cy="1828800"/>
+          </a:xfrm>
+        </p:spPr>
+      </p:pic>
+    </p:spTree>
+    <p:extLst>
+      <p:ext uri="{BB962C8B-B14F-4D97-AF65-F5344CB8AC3E}">
+        <p14:creationId xmlns:p14="http://schemas.microsoft.com/office/powerpoint/2010/main" val="2863298119"/>
+      </p:ext>
+    </p:extLst>
+  </p:cSld>
+  <p:clrMapOvr>
+    <a:masterClrMapping/>
+  </p:clrMapOvr>
+</p:sld>
+</file>
+
 <file path=ppt/slides/slide2.xml><?xml version="1.0" encoding="utf-8"?>
 <p:sld xmlns:a="http://schemas.openxmlformats.org/drawingml/2006/main" xmlns:r="http://schemas.openxmlformats.org/officeDocument/2006/relationships" xmlns:p="http://schemas.openxmlformats.org/presentationml/2006/main">
   <p:cSld>
@@ -5958,12 +8440,78 @@
               <a:t>Iterating over data sets, arrays, and objects</a:t>
             </a:r>
           </a:p>
+          <a:p>
+            <a:r>
+              <a:rPr lang="en-US" sz="2200" dirty="0"/>
+              <a:t>Iteration – the repeated execution of statements</a:t>
+            </a:r>
+          </a:p>
         </p:txBody>
       </p:sp>
     </p:spTree>
     <p:extLst>
       <p:ext uri="{BB962C8B-B14F-4D97-AF65-F5344CB8AC3E}">
         <p14:creationId xmlns:p14="http://schemas.microsoft.com/office/powerpoint/2010/main" val="273175089"/>
+      </p:ext>
+    </p:extLst>
+  </p:cSld>
+  <p:clrMapOvr>
+    <a:masterClrMapping/>
+  </p:clrMapOvr>
+</p:sld>
+</file>
+
+<file path=ppt/slides/slide20.xml><?xml version="1.0" encoding="utf-8"?>
+<p:sld xmlns:a="http://schemas.openxmlformats.org/drawingml/2006/main" xmlns:r="http://schemas.openxmlformats.org/officeDocument/2006/relationships" xmlns:p="http://schemas.openxmlformats.org/presentationml/2006/main">
+  <p:cSld>
+    <p:spTree>
+      <p:nvGrpSpPr>
+        <p:cNvPr id="1" name=""/>
+        <p:cNvGrpSpPr/>
+        <p:nvPr/>
+      </p:nvGrpSpPr>
+      <p:grpSpPr>
+        <a:xfrm>
+          <a:off x="0" y="0"/>
+          <a:ext cx="0" cy="0"/>
+          <a:chOff x="0" y="0"/>
+          <a:chExt cx="0" cy="0"/>
+        </a:xfrm>
+      </p:grpSpPr>
+      <p:pic>
+        <p:nvPicPr>
+          <p:cNvPr id="3" name="Picture 2">
+            <a:extLst>
+              <a:ext uri="{FF2B5EF4-FFF2-40B4-BE49-F238E27FC236}">
+                <a16:creationId xmlns:a16="http://schemas.microsoft.com/office/drawing/2014/main" id="{3FEAA513-8F76-2074-721B-1BDB4BEBA2F0}"/>
+              </a:ext>
+            </a:extLst>
+          </p:cNvPr>
+          <p:cNvPicPr>
+            <a:picLocks noChangeAspect="1"/>
+          </p:cNvPicPr>
+          <p:nvPr/>
+        </p:nvPicPr>
+        <p:blipFill>
+          <a:blip r:embed="rId2"/>
+          <a:stretch>
+            <a:fillRect/>
+          </a:stretch>
+        </p:blipFill>
+        <p:spPr>
+          <a:xfrm>
+            <a:off x="2209800" y="596069"/>
+            <a:ext cx="7772400" cy="5665861"/>
+          </a:xfrm>
+          <a:prstGeom prst="rect">
+            <a:avLst/>
+          </a:prstGeom>
+        </p:spPr>
+      </p:pic>
+    </p:spTree>
+    <p:extLst>
+      <p:ext uri="{BB962C8B-B14F-4D97-AF65-F5344CB8AC3E}">
+        <p14:creationId xmlns:p14="http://schemas.microsoft.com/office/powerpoint/2010/main" val="694697594"/>
       </p:ext>
     </p:extLst>
   </p:cSld>
@@ -6143,7 +8691,7 @@
         <p:spPr/>
         <p:txBody>
           <a:bodyPr>
-            <a:normAutofit lnSpcReduction="10000"/>
+            <a:normAutofit/>
           </a:bodyPr>
           <a:lstStyle/>
           <a:p>
@@ -6180,32 +8728,7 @@
             </a:r>
           </a:p>
           <a:p>
-            <a:pPr lvl="1"/>
-            <a:r>
-              <a:rPr lang="en-US" sz="2000" dirty="0"/>
-              <a:t>for (initialization; condition; update) {</a:t>
-            </a:r>
-            <a:br>
-              <a:rPr lang="en-US" sz="2000" dirty="0"/>
-            </a:br>
-            <a:r>
-              <a:rPr lang="en-US" sz="2000" dirty="0"/>
-              <a:t>		// statements to be repeated </a:t>
-            </a:r>
-            <a:br>
-              <a:rPr lang="en-US" sz="2000" dirty="0"/>
-            </a:br>
-            <a:r>
-              <a:rPr lang="en-US" sz="2000" dirty="0"/>
-              <a:t>  	 	// each time loop runs</a:t>
-            </a:r>
-            <a:br>
-              <a:rPr lang="en-US" sz="2000" dirty="0"/>
-            </a:br>
-            <a:r>
-              <a:rPr lang="en-US" sz="2000" dirty="0"/>
-              <a:t>}</a:t>
-            </a:r>
+            <a:endParaRPr lang="en-US" dirty="0"/>
           </a:p>
           <a:p>
             <a:endParaRPr lang="en-US" dirty="0"/>
@@ -6242,121 +8765,70 @@
           <a:chExt cx="0" cy="0"/>
         </a:xfrm>
       </p:grpSpPr>
-      <p:sp>
-        <p:nvSpPr>
-          <p:cNvPr id="2" name="Title 1">
+      <p:pic>
+        <p:nvPicPr>
+          <p:cNvPr id="4" name="Picture 3">
             <a:extLst>
               <a:ext uri="{FF2B5EF4-FFF2-40B4-BE49-F238E27FC236}">
-                <a16:creationId xmlns:a16="http://schemas.microsoft.com/office/drawing/2014/main" id="{D849077D-477A-8A9E-FF7F-9AA202845C29}"/>
+                <a16:creationId xmlns:a16="http://schemas.microsoft.com/office/drawing/2014/main" id="{3E9C9294-60A5-93DA-A327-006610310088}"/>
               </a:ext>
             </a:extLst>
           </p:cNvPr>
-          <p:cNvSpPr>
-            <a:spLocks noGrp="1"/>
-          </p:cNvSpPr>
-          <p:nvPr>
-            <p:ph type="title"/>
-          </p:nvPr>
-        </p:nvSpPr>
-        <p:spPr/>
-        <p:txBody>
-          <a:bodyPr/>
-          <a:lstStyle/>
-          <a:p>
-            <a:r>
-              <a:rPr lang="en-US" dirty="0"/>
-              <a:t>For loops (cont’d)</a:t>
-            </a:r>
-          </a:p>
-        </p:txBody>
-      </p:sp>
-      <p:sp>
-        <p:nvSpPr>
-          <p:cNvPr id="3" name="Content Placeholder 2">
+          <p:cNvPicPr>
+            <a:picLocks noChangeAspect="1"/>
+          </p:cNvPicPr>
+          <p:nvPr/>
+        </p:nvPicPr>
+        <p:blipFill>
+          <a:blip r:embed="rId2"/>
+          <a:stretch>
+            <a:fillRect/>
+          </a:stretch>
+        </p:blipFill>
+        <p:spPr>
+          <a:xfrm>
+            <a:off x="248949" y="2765959"/>
+            <a:ext cx="5665982" cy="1326081"/>
+          </a:xfrm>
+          <a:prstGeom prst="rect">
+            <a:avLst/>
+          </a:prstGeom>
+        </p:spPr>
+      </p:pic>
+      <p:pic>
+        <p:nvPicPr>
+          <p:cNvPr id="6" name="Picture 5">
             <a:extLst>
               <a:ext uri="{FF2B5EF4-FFF2-40B4-BE49-F238E27FC236}">
-                <a16:creationId xmlns:a16="http://schemas.microsoft.com/office/drawing/2014/main" id="{68367D85-DCF3-9694-D001-C0245BE2BE4C}"/>
+                <a16:creationId xmlns:a16="http://schemas.microsoft.com/office/drawing/2014/main" id="{5335526A-5E0D-4582-6EA3-3090D783535B}"/>
               </a:ext>
             </a:extLst>
           </p:cNvPr>
-          <p:cNvSpPr>
-            <a:spLocks noGrp="1"/>
-          </p:cNvSpPr>
-          <p:nvPr>
-            <p:ph idx="1"/>
-          </p:nvPr>
-        </p:nvSpPr>
-        <p:spPr/>
-        <p:txBody>
-          <a:bodyPr>
-            <a:normAutofit/>
-          </a:bodyPr>
-          <a:lstStyle/>
-          <a:p>
-            <a:r>
-              <a:rPr lang="en-US" sz="3600" dirty="0"/>
-              <a:t>for (let </a:t>
-            </a:r>
-            <a:r>
-              <a:rPr lang="en-US" sz="3600" dirty="0" err="1"/>
-              <a:t>i</a:t>
-            </a:r>
-            <a:r>
-              <a:rPr lang="en-US" sz="3600" dirty="0"/>
-              <a:t> = 1; </a:t>
-            </a:r>
-            <a:r>
-              <a:rPr lang="en-US" sz="3600" dirty="0" err="1"/>
-              <a:t>i</a:t>
-            </a:r>
-            <a:r>
-              <a:rPr lang="en-US" sz="3600" dirty="0"/>
-              <a:t> &lt;= 5, </a:t>
-            </a:r>
-            <a:r>
-              <a:rPr lang="en-US" sz="3600" dirty="0" err="1"/>
-              <a:t>i</a:t>
-            </a:r>
-            <a:r>
-              <a:rPr lang="en-US" sz="3600" dirty="0"/>
-              <a:t>++) {</a:t>
-            </a:r>
-            <a:br>
-              <a:rPr lang="en-US" sz="3600" dirty="0"/>
-            </a:br>
-            <a:r>
-              <a:rPr lang="en-US" sz="3600" dirty="0"/>
-              <a:t>	console.log(`Number ${</a:t>
-            </a:r>
-            <a:r>
-              <a:rPr lang="en-US" sz="3600" dirty="0" err="1"/>
-              <a:t>i</a:t>
-            </a:r>
-            <a:r>
-              <a:rPr lang="en-US" sz="3600" dirty="0"/>
-              <a:t>}`);</a:t>
-            </a:r>
-            <a:br>
-              <a:rPr lang="en-US" sz="3600" dirty="0"/>
-            </a:br>
-            <a:r>
-              <a:rPr lang="en-US" sz="3600" dirty="0"/>
-              <a:t>}</a:t>
-            </a:r>
-            <a:br>
-              <a:rPr lang="en-US" sz="3600" dirty="0"/>
-            </a:br>
-            <a:r>
-              <a:rPr lang="en-US" sz="3600" dirty="0"/>
-              <a:t>console.log(`Loop ended`);</a:t>
-            </a:r>
-          </a:p>
-        </p:txBody>
-      </p:sp>
+          <p:cNvPicPr>
+            <a:picLocks noChangeAspect="1"/>
+          </p:cNvPicPr>
+          <p:nvPr/>
+        </p:nvPicPr>
+        <p:blipFill>
+          <a:blip r:embed="rId3"/>
+          <a:stretch>
+            <a:fillRect/>
+          </a:stretch>
+        </p:blipFill>
+        <p:spPr>
+          <a:xfrm>
+            <a:off x="7494823" y="298450"/>
+            <a:ext cx="3594100" cy="6261100"/>
+          </a:xfrm>
+          <a:prstGeom prst="rect">
+            <a:avLst/>
+          </a:prstGeom>
+        </p:spPr>
+      </p:pic>
     </p:spTree>
     <p:extLst>
       <p:ext uri="{BB962C8B-B14F-4D97-AF65-F5344CB8AC3E}">
-        <p14:creationId xmlns:p14="http://schemas.microsoft.com/office/powerpoint/2010/main" val="3948292726"/>
+        <p14:creationId xmlns:p14="http://schemas.microsoft.com/office/powerpoint/2010/main" val="113394240"/>
       </p:ext>
     </p:extLst>
   </p:cSld>
@@ -6388,7 +8860,7 @@
           <p:cNvPr id="2" name="Title 1">
             <a:extLst>
               <a:ext uri="{FF2B5EF4-FFF2-40B4-BE49-F238E27FC236}">
-                <a16:creationId xmlns:a16="http://schemas.microsoft.com/office/drawing/2014/main" id="{16D82FA7-B4A6-63F3-9C14-FBEF8B086EDD}"/>
+                <a16:creationId xmlns:a16="http://schemas.microsoft.com/office/drawing/2014/main" id="{D849077D-477A-8A9E-FF7F-9AA202845C29}"/>
               </a:ext>
             </a:extLst>
           </p:cNvPr>
@@ -6411,198 +8883,39 @@
           </a:p>
         </p:txBody>
       </p:sp>
-      <p:sp>
-        <p:nvSpPr>
-          <p:cNvPr id="3" name="Content Placeholder 2">
+      <p:pic>
+        <p:nvPicPr>
+          <p:cNvPr id="5" name="Content Placeholder 4">
             <a:extLst>
               <a:ext uri="{FF2B5EF4-FFF2-40B4-BE49-F238E27FC236}">
-                <a16:creationId xmlns:a16="http://schemas.microsoft.com/office/drawing/2014/main" id="{2F3EC4AA-AF9E-8B16-0686-E452D5E1D4EC}"/>
+                <a16:creationId xmlns:a16="http://schemas.microsoft.com/office/drawing/2014/main" id="{9E09D43C-84F5-2657-1812-E7FBDC0619FC}"/>
               </a:ext>
             </a:extLst>
           </p:cNvPr>
-          <p:cNvSpPr>
-            <a:spLocks noGrp="1"/>
-          </p:cNvSpPr>
-          <p:nvPr>
-            <p:ph sz="half" idx="1"/>
-          </p:nvPr>
-        </p:nvSpPr>
-        <p:spPr/>
-        <p:txBody>
-          <a:bodyPr/>
-          <a:lstStyle/>
-          <a:p>
-            <a:r>
-              <a:rPr lang="en-US" dirty="0" err="1"/>
-              <a:t>i</a:t>
-            </a:r>
-            <a:r>
-              <a:rPr lang="en-US" dirty="0"/>
-              <a:t> is set to 1</a:t>
-            </a:r>
-          </a:p>
-          <a:p>
-            <a:r>
-              <a:rPr lang="en-US" dirty="0"/>
-              <a:t>Check if </a:t>
-            </a:r>
-            <a:r>
-              <a:rPr lang="en-US" dirty="0" err="1"/>
-              <a:t>i</a:t>
-            </a:r>
-            <a:r>
-              <a:rPr lang="en-US" dirty="0"/>
-              <a:t> is less than or equal to  5 – it is</a:t>
-            </a:r>
-          </a:p>
-          <a:p>
-            <a:r>
-              <a:rPr lang="en-US" dirty="0"/>
-              <a:t>Console: Number 1</a:t>
-            </a:r>
-          </a:p>
-          <a:p>
-            <a:r>
-              <a:rPr lang="en-US" dirty="0"/>
-              <a:t>Increment </a:t>
-            </a:r>
-            <a:r>
-              <a:rPr lang="en-US" dirty="0" err="1"/>
-              <a:t>i</a:t>
-            </a:r>
-            <a:r>
-              <a:rPr lang="en-US" dirty="0"/>
-              <a:t> to 2</a:t>
-            </a:r>
-          </a:p>
-          <a:p>
-            <a:r>
-              <a:rPr lang="en-US" dirty="0"/>
-              <a:t>Check if </a:t>
-            </a:r>
-            <a:r>
-              <a:rPr lang="en-US" dirty="0" err="1"/>
-              <a:t>i</a:t>
-            </a:r>
-            <a:r>
-              <a:rPr lang="en-US" dirty="0"/>
-              <a:t> is less than or equal to 5 – it is</a:t>
-            </a:r>
-          </a:p>
-          <a:p>
-            <a:r>
-              <a:rPr lang="en-US" dirty="0"/>
-              <a:t>Console: Number 2</a:t>
-            </a:r>
-          </a:p>
-          <a:p>
-            <a:r>
-              <a:rPr lang="en-US" dirty="0"/>
-              <a:t>Increment </a:t>
-            </a:r>
-            <a:r>
-              <a:rPr lang="en-US" dirty="0" err="1"/>
-              <a:t>i</a:t>
-            </a:r>
-            <a:r>
-              <a:rPr lang="en-US" dirty="0"/>
-              <a:t> to 3</a:t>
-            </a:r>
-          </a:p>
-        </p:txBody>
-      </p:sp>
-      <p:sp>
-        <p:nvSpPr>
-          <p:cNvPr id="4" name="Content Placeholder 3">
-            <a:extLst>
-              <a:ext uri="{FF2B5EF4-FFF2-40B4-BE49-F238E27FC236}">
-                <a16:creationId xmlns:a16="http://schemas.microsoft.com/office/drawing/2014/main" id="{05BF9B95-37D9-5069-989E-860961BDF2F1}"/>
-              </a:ext>
-            </a:extLst>
-          </p:cNvPr>
-          <p:cNvSpPr>
-            <a:spLocks noGrp="1"/>
-          </p:cNvSpPr>
-          <p:nvPr>
-            <p:ph sz="half" idx="2"/>
-          </p:nvPr>
-        </p:nvSpPr>
-        <p:spPr/>
-        <p:txBody>
-          <a:bodyPr/>
-          <a:lstStyle/>
-          <a:p>
-            <a:r>
-              <a:rPr lang="en-US" dirty="0"/>
-              <a:t>Check if </a:t>
-            </a:r>
-            <a:r>
-              <a:rPr lang="en-US" dirty="0" err="1"/>
-              <a:t>i</a:t>
-            </a:r>
-            <a:r>
-              <a:rPr lang="en-US" dirty="0"/>
-              <a:t> is less than or equal to 5 – it is</a:t>
-            </a:r>
-          </a:p>
-          <a:p>
-            <a:r>
-              <a:rPr lang="en-US" dirty="0"/>
-              <a:t>Console: Number 3</a:t>
-            </a:r>
-          </a:p>
-          <a:p>
-            <a:r>
-              <a:rPr lang="en-US" dirty="0"/>
-              <a:t>(increment to 4, 5, check, console.log)</a:t>
-            </a:r>
-          </a:p>
-          <a:p>
-            <a:r>
-              <a:rPr lang="en-US" dirty="0"/>
-              <a:t>Increment </a:t>
-            </a:r>
-            <a:r>
-              <a:rPr lang="en-US" dirty="0" err="1"/>
-              <a:t>i</a:t>
-            </a:r>
-            <a:r>
-              <a:rPr lang="en-US" dirty="0"/>
-              <a:t> to 6</a:t>
-            </a:r>
-          </a:p>
-          <a:p>
-            <a:r>
-              <a:rPr lang="en-US" dirty="0"/>
-              <a:t>Check if </a:t>
-            </a:r>
-            <a:r>
-              <a:rPr lang="en-US" dirty="0" err="1"/>
-              <a:t>i</a:t>
-            </a:r>
-            <a:r>
-              <a:rPr lang="en-US" dirty="0"/>
-              <a:t> is less than or equal to 5 – it is not</a:t>
-            </a:r>
-          </a:p>
-          <a:p>
-            <a:r>
-              <a:rPr lang="en-US" dirty="0"/>
-              <a:t>Exit loop</a:t>
-            </a:r>
-          </a:p>
-          <a:p>
-            <a:r>
-              <a:rPr lang="en-US" dirty="0"/>
-              <a:t>Console: Loop ended</a:t>
-            </a:r>
-          </a:p>
-        </p:txBody>
-      </p:sp>
+          <p:cNvPicPr>
+            <a:picLocks noGrp="1" noChangeAspect="1"/>
+          </p:cNvPicPr>
+          <p:nvPr>
+            <p:ph idx="1"/>
+          </p:nvPr>
+        </p:nvPicPr>
+        <p:blipFill>
+          <a:blip r:embed="rId2"/>
+          <a:stretch>
+            <a:fillRect/>
+          </a:stretch>
+        </p:blipFill>
+        <p:spPr>
+          <a:xfrm>
+            <a:off x="3004620" y="2405797"/>
+            <a:ext cx="6182759" cy="2046406"/>
+          </a:xfrm>
+        </p:spPr>
+      </p:pic>
     </p:spTree>
     <p:extLst>
       <p:ext uri="{BB962C8B-B14F-4D97-AF65-F5344CB8AC3E}">
-        <p14:creationId xmlns:p14="http://schemas.microsoft.com/office/powerpoint/2010/main" val="75873024"/>
+        <p14:creationId xmlns:p14="http://schemas.microsoft.com/office/powerpoint/2010/main" val="3948292726"/>
       </p:ext>
     </p:extLst>
   </p:cSld>
@@ -6629,6 +8942,608 @@
           <a:chExt cx="0" cy="0"/>
         </a:xfrm>
       </p:grpSpPr>
+      <p:graphicFrame>
+        <p:nvGraphicFramePr>
+          <p:cNvPr id="5" name="Table 4">
+            <a:extLst>
+              <a:ext uri="{FF2B5EF4-FFF2-40B4-BE49-F238E27FC236}">
+                <a16:creationId xmlns:a16="http://schemas.microsoft.com/office/drawing/2014/main" id="{CAD93BFF-50C6-3535-6C55-4945099906B6}"/>
+              </a:ext>
+            </a:extLst>
+          </p:cNvPr>
+          <p:cNvGraphicFramePr>
+            <a:graphicFrameLocks noGrp="1"/>
+          </p:cNvGraphicFramePr>
+          <p:nvPr>
+            <p:extLst>
+              <p:ext uri="{D42A27DB-BD31-4B8C-83A1-F6EECF244321}">
+                <p14:modId xmlns:p14="http://schemas.microsoft.com/office/powerpoint/2010/main" val="2801225018"/>
+              </p:ext>
+            </p:extLst>
+          </p:nvPr>
+        </p:nvGraphicFramePr>
+        <p:xfrm>
+          <a:off x="2032000" y="1710844"/>
+          <a:ext cx="8128000" cy="3436312"/>
+        </p:xfrm>
+        <a:graphic>
+          <a:graphicData uri="http://schemas.openxmlformats.org/drawingml/2006/table">
+            <a:tbl>
+              <a:tblPr firstRow="1" bandRow="1">
+                <a:tableStyleId>{5C22544A-7EE6-4342-B048-85BDC9FD1C3A}</a:tableStyleId>
+              </a:tblPr>
+              <a:tblGrid>
+                <a:gridCol w="1625600">
+                  <a:extLst>
+                    <a:ext uri="{9D8B030D-6E8A-4147-A177-3AD203B41FA5}">
+                      <a16:colId xmlns:a16="http://schemas.microsoft.com/office/drawing/2014/main" val="1725750097"/>
+                    </a:ext>
+                  </a:extLst>
+                </a:gridCol>
+                <a:gridCol w="1625600">
+                  <a:extLst>
+                    <a:ext uri="{9D8B030D-6E8A-4147-A177-3AD203B41FA5}">
+                      <a16:colId xmlns:a16="http://schemas.microsoft.com/office/drawing/2014/main" val="2465909280"/>
+                    </a:ext>
+                  </a:extLst>
+                </a:gridCol>
+                <a:gridCol w="1625600">
+                  <a:extLst>
+                    <a:ext uri="{9D8B030D-6E8A-4147-A177-3AD203B41FA5}">
+                      <a16:colId xmlns:a16="http://schemas.microsoft.com/office/drawing/2014/main" val="724387672"/>
+                    </a:ext>
+                  </a:extLst>
+                </a:gridCol>
+                <a:gridCol w="1625600">
+                  <a:extLst>
+                    <a:ext uri="{9D8B030D-6E8A-4147-A177-3AD203B41FA5}">
+                      <a16:colId xmlns:a16="http://schemas.microsoft.com/office/drawing/2014/main" val="26891586"/>
+                    </a:ext>
+                  </a:extLst>
+                </a:gridCol>
+                <a:gridCol w="1625600">
+                  <a:extLst>
+                    <a:ext uri="{9D8B030D-6E8A-4147-A177-3AD203B41FA5}">
+                      <a16:colId xmlns:a16="http://schemas.microsoft.com/office/drawing/2014/main" val="2657176196"/>
+                    </a:ext>
+                  </a:extLst>
+                </a:gridCol>
+              </a:tblGrid>
+              <a:tr h="1196572">
+                <a:tc>
+                  <a:txBody>
+                    <a:bodyPr/>
+                    <a:lstStyle/>
+                    <a:p>
+                      <a:r>
+                        <a:rPr lang="en-US" dirty="0"/>
+                        <a:t>Value of i before checking condition</a:t>
+                      </a:r>
+                    </a:p>
+                  </a:txBody>
+                  <a:tcPr/>
+                </a:tc>
+                <a:tc>
+                  <a:txBody>
+                    <a:bodyPr/>
+                    <a:lstStyle/>
+                    <a:p>
+                      <a:r>
+                        <a:rPr lang="en-US" dirty="0"/>
+                        <a:t>Is condition met?</a:t>
+                      </a:r>
+                    </a:p>
+                  </a:txBody>
+                  <a:tcPr/>
+                </a:tc>
+                <a:tc>
+                  <a:txBody>
+                    <a:bodyPr/>
+                    <a:lstStyle/>
+                    <a:p>
+                      <a:r>
+                        <a:rPr lang="en-US" dirty="0"/>
+                        <a:t>Execute Loop Body?</a:t>
+                      </a:r>
+                    </a:p>
+                  </a:txBody>
+                  <a:tcPr/>
+                </a:tc>
+                <a:tc>
+                  <a:txBody>
+                    <a:bodyPr/>
+                    <a:lstStyle/>
+                    <a:p>
+                      <a:r>
+                        <a:rPr lang="en-US" dirty="0"/>
+                        <a:t>Console log output</a:t>
+                      </a:r>
+                    </a:p>
+                  </a:txBody>
+                  <a:tcPr/>
+                </a:tc>
+                <a:tc>
+                  <a:txBody>
+                    <a:bodyPr/>
+                    <a:lstStyle/>
+                    <a:p>
+                      <a:r>
+                        <a:rPr lang="en-US" dirty="0"/>
+                        <a:t>Value of i after updating</a:t>
+                      </a:r>
+                    </a:p>
+                  </a:txBody>
+                  <a:tcPr/>
+                </a:tc>
+                <a:extLst>
+                  <a:ext uri="{0D108BD9-81ED-4DB2-BD59-A6C34878D82A}">
+                    <a16:rowId xmlns:a16="http://schemas.microsoft.com/office/drawing/2014/main" val="2954336438"/>
+                  </a:ext>
+                </a:extLst>
+              </a:tr>
+              <a:tr h="373290">
+                <a:tc>
+                  <a:txBody>
+                    <a:bodyPr/>
+                    <a:lstStyle/>
+                    <a:p>
+                      <a:r>
+                        <a:rPr lang="en-US" dirty="0"/>
+                        <a:t>1</a:t>
+                      </a:r>
+                    </a:p>
+                  </a:txBody>
+                  <a:tcPr/>
+                </a:tc>
+                <a:tc>
+                  <a:txBody>
+                    <a:bodyPr/>
+                    <a:lstStyle/>
+                    <a:p>
+                      <a:r>
+                        <a:rPr lang="en-US" dirty="0"/>
+                        <a:t>1 &lt;= 5  true</a:t>
+                      </a:r>
+                    </a:p>
+                  </a:txBody>
+                  <a:tcPr/>
+                </a:tc>
+                <a:tc>
+                  <a:txBody>
+                    <a:bodyPr/>
+                    <a:lstStyle/>
+                    <a:p>
+                      <a:r>
+                        <a:rPr lang="en-US" dirty="0"/>
+                        <a:t>Yes</a:t>
+                      </a:r>
+                    </a:p>
+                  </a:txBody>
+                  <a:tcPr/>
+                </a:tc>
+                <a:tc>
+                  <a:txBody>
+                    <a:bodyPr/>
+                    <a:lstStyle/>
+                    <a:p>
+                      <a:r>
+                        <a:rPr lang="en-US" dirty="0"/>
+                        <a:t>Number 1</a:t>
+                      </a:r>
+                    </a:p>
+                  </a:txBody>
+                  <a:tcPr/>
+                </a:tc>
+                <a:tc>
+                  <a:txBody>
+                    <a:bodyPr/>
+                    <a:lstStyle/>
+                    <a:p>
+                      <a:r>
+                        <a:rPr lang="en-US" dirty="0"/>
+                        <a:t>2</a:t>
+                      </a:r>
+                    </a:p>
+                  </a:txBody>
+                  <a:tcPr/>
+                </a:tc>
+                <a:extLst>
+                  <a:ext uri="{0D108BD9-81ED-4DB2-BD59-A6C34878D82A}">
+                    <a16:rowId xmlns:a16="http://schemas.microsoft.com/office/drawing/2014/main" val="923339703"/>
+                  </a:ext>
+                </a:extLst>
+              </a:tr>
+              <a:tr h="373290">
+                <a:tc>
+                  <a:txBody>
+                    <a:bodyPr/>
+                    <a:lstStyle/>
+                    <a:p>
+                      <a:r>
+                        <a:rPr lang="en-US" dirty="0"/>
+                        <a:t>2</a:t>
+                      </a:r>
+                    </a:p>
+                  </a:txBody>
+                  <a:tcPr/>
+                </a:tc>
+                <a:tc>
+                  <a:txBody>
+                    <a:bodyPr/>
+                    <a:lstStyle/>
+                    <a:p>
+                      <a:r>
+                        <a:rPr lang="en-US" dirty="0"/>
+                        <a:t>2 &lt;= 5  true</a:t>
+                      </a:r>
+                    </a:p>
+                  </a:txBody>
+                  <a:tcPr/>
+                </a:tc>
+                <a:tc>
+                  <a:txBody>
+                    <a:bodyPr/>
+                    <a:lstStyle/>
+                    <a:p>
+                      <a:r>
+                        <a:rPr lang="en-US" dirty="0"/>
+                        <a:t>Yes</a:t>
+                      </a:r>
+                    </a:p>
+                  </a:txBody>
+                  <a:tcPr/>
+                </a:tc>
+                <a:tc>
+                  <a:txBody>
+                    <a:bodyPr/>
+                    <a:lstStyle/>
+                    <a:p>
+                      <a:r>
+                        <a:rPr lang="en-US" dirty="0"/>
+                        <a:t>Number 2</a:t>
+                      </a:r>
+                    </a:p>
+                  </a:txBody>
+                  <a:tcPr/>
+                </a:tc>
+                <a:tc>
+                  <a:txBody>
+                    <a:bodyPr/>
+                    <a:lstStyle/>
+                    <a:p>
+                      <a:r>
+                        <a:rPr lang="en-US" dirty="0"/>
+                        <a:t>3</a:t>
+                      </a:r>
+                    </a:p>
+                  </a:txBody>
+                  <a:tcPr/>
+                </a:tc>
+                <a:extLst>
+                  <a:ext uri="{0D108BD9-81ED-4DB2-BD59-A6C34878D82A}">
+                    <a16:rowId xmlns:a16="http://schemas.microsoft.com/office/drawing/2014/main" val="1009775460"/>
+                  </a:ext>
+                </a:extLst>
+              </a:tr>
+              <a:tr h="373290">
+                <a:tc>
+                  <a:txBody>
+                    <a:bodyPr/>
+                    <a:lstStyle/>
+                    <a:p>
+                      <a:r>
+                        <a:rPr lang="en-US" dirty="0"/>
+                        <a:t>3</a:t>
+                      </a:r>
+                    </a:p>
+                  </a:txBody>
+                  <a:tcPr/>
+                </a:tc>
+                <a:tc>
+                  <a:txBody>
+                    <a:bodyPr/>
+                    <a:lstStyle/>
+                    <a:p>
+                      <a:r>
+                        <a:rPr lang="en-US" dirty="0"/>
+                        <a:t>3 &lt;= 5  true</a:t>
+                      </a:r>
+                    </a:p>
+                  </a:txBody>
+                  <a:tcPr/>
+                </a:tc>
+                <a:tc>
+                  <a:txBody>
+                    <a:bodyPr/>
+                    <a:lstStyle/>
+                    <a:p>
+                      <a:r>
+                        <a:rPr lang="en-US" dirty="0"/>
+                        <a:t>Yes</a:t>
+                      </a:r>
+                    </a:p>
+                  </a:txBody>
+                  <a:tcPr/>
+                </a:tc>
+                <a:tc>
+                  <a:txBody>
+                    <a:bodyPr/>
+                    <a:lstStyle/>
+                    <a:p>
+                      <a:r>
+                        <a:rPr lang="en-US" dirty="0"/>
+                        <a:t>Number 3</a:t>
+                      </a:r>
+                    </a:p>
+                  </a:txBody>
+                  <a:tcPr/>
+                </a:tc>
+                <a:tc>
+                  <a:txBody>
+                    <a:bodyPr/>
+                    <a:lstStyle/>
+                    <a:p>
+                      <a:r>
+                        <a:rPr lang="en-US" dirty="0"/>
+                        <a:t>4</a:t>
+                      </a:r>
+                    </a:p>
+                  </a:txBody>
+                  <a:tcPr/>
+                </a:tc>
+                <a:extLst>
+                  <a:ext uri="{0D108BD9-81ED-4DB2-BD59-A6C34878D82A}">
+                    <a16:rowId xmlns:a16="http://schemas.microsoft.com/office/drawing/2014/main" val="4118327483"/>
+                  </a:ext>
+                </a:extLst>
+              </a:tr>
+              <a:tr h="373290">
+                <a:tc>
+                  <a:txBody>
+                    <a:bodyPr/>
+                    <a:lstStyle/>
+                    <a:p>
+                      <a:r>
+                        <a:rPr lang="en-US" dirty="0"/>
+                        <a:t>4</a:t>
+                      </a:r>
+                    </a:p>
+                  </a:txBody>
+                  <a:tcPr/>
+                </a:tc>
+                <a:tc>
+                  <a:txBody>
+                    <a:bodyPr/>
+                    <a:lstStyle/>
+                    <a:p>
+                      <a:r>
+                        <a:rPr lang="en-US" dirty="0"/>
+                        <a:t>4 &lt;= 5  true</a:t>
+                      </a:r>
+                    </a:p>
+                  </a:txBody>
+                  <a:tcPr/>
+                </a:tc>
+                <a:tc>
+                  <a:txBody>
+                    <a:bodyPr/>
+                    <a:lstStyle/>
+                    <a:p>
+                      <a:r>
+                        <a:rPr lang="en-US" dirty="0"/>
+                        <a:t>Yes</a:t>
+                      </a:r>
+                    </a:p>
+                  </a:txBody>
+                  <a:tcPr/>
+                </a:tc>
+                <a:tc>
+                  <a:txBody>
+                    <a:bodyPr/>
+                    <a:lstStyle/>
+                    <a:p>
+                      <a:r>
+                        <a:rPr lang="en-US" dirty="0"/>
+                        <a:t>Number 4</a:t>
+                      </a:r>
+                    </a:p>
+                  </a:txBody>
+                  <a:tcPr/>
+                </a:tc>
+                <a:tc>
+                  <a:txBody>
+                    <a:bodyPr/>
+                    <a:lstStyle/>
+                    <a:p>
+                      <a:r>
+                        <a:rPr lang="en-US" dirty="0"/>
+                        <a:t>5</a:t>
+                      </a:r>
+                    </a:p>
+                  </a:txBody>
+                  <a:tcPr/>
+                </a:tc>
+                <a:extLst>
+                  <a:ext uri="{0D108BD9-81ED-4DB2-BD59-A6C34878D82A}">
+                    <a16:rowId xmlns:a16="http://schemas.microsoft.com/office/drawing/2014/main" val="1339530707"/>
+                  </a:ext>
+                </a:extLst>
+              </a:tr>
+              <a:tr h="373290">
+                <a:tc>
+                  <a:txBody>
+                    <a:bodyPr/>
+                    <a:lstStyle/>
+                    <a:p>
+                      <a:r>
+                        <a:rPr lang="en-US" dirty="0"/>
+                        <a:t>5</a:t>
+                      </a:r>
+                    </a:p>
+                  </a:txBody>
+                  <a:tcPr/>
+                </a:tc>
+                <a:tc>
+                  <a:txBody>
+                    <a:bodyPr/>
+                    <a:lstStyle/>
+                    <a:p>
+                      <a:r>
+                        <a:rPr lang="en-US" dirty="0"/>
+                        <a:t>5 &lt;= 5  true</a:t>
+                      </a:r>
+                    </a:p>
+                  </a:txBody>
+                  <a:tcPr/>
+                </a:tc>
+                <a:tc>
+                  <a:txBody>
+                    <a:bodyPr/>
+                    <a:lstStyle/>
+                    <a:p>
+                      <a:r>
+                        <a:rPr lang="en-US" dirty="0"/>
+                        <a:t>Yes</a:t>
+                      </a:r>
+                    </a:p>
+                  </a:txBody>
+                  <a:tcPr/>
+                </a:tc>
+                <a:tc>
+                  <a:txBody>
+                    <a:bodyPr/>
+                    <a:lstStyle/>
+                    <a:p>
+                      <a:r>
+                        <a:rPr lang="en-US" dirty="0"/>
+                        <a:t>Number 5</a:t>
+                      </a:r>
+                    </a:p>
+                  </a:txBody>
+                  <a:tcPr/>
+                </a:tc>
+                <a:tc>
+                  <a:txBody>
+                    <a:bodyPr/>
+                    <a:lstStyle/>
+                    <a:p>
+                      <a:r>
+                        <a:rPr lang="en-US" dirty="0"/>
+                        <a:t>6</a:t>
+                      </a:r>
+                    </a:p>
+                  </a:txBody>
+                  <a:tcPr/>
+                </a:tc>
+                <a:extLst>
+                  <a:ext uri="{0D108BD9-81ED-4DB2-BD59-A6C34878D82A}">
+                    <a16:rowId xmlns:a16="http://schemas.microsoft.com/office/drawing/2014/main" val="473376441"/>
+                  </a:ext>
+                </a:extLst>
+              </a:tr>
+              <a:tr h="373290">
+                <a:tc>
+                  <a:txBody>
+                    <a:bodyPr/>
+                    <a:lstStyle/>
+                    <a:p>
+                      <a:r>
+                        <a:rPr lang="en-US" dirty="0"/>
+                        <a:t>6</a:t>
+                      </a:r>
+                    </a:p>
+                  </a:txBody>
+                  <a:tcPr/>
+                </a:tc>
+                <a:tc>
+                  <a:txBody>
+                    <a:bodyPr/>
+                    <a:lstStyle/>
+                    <a:p>
+                      <a:r>
+                        <a:rPr lang="en-US" dirty="0"/>
+                        <a:t>6 &lt;= 5  false</a:t>
+                      </a:r>
+                    </a:p>
+                  </a:txBody>
+                  <a:tcPr/>
+                </a:tc>
+                <a:tc>
+                  <a:txBody>
+                    <a:bodyPr/>
+                    <a:lstStyle/>
+                    <a:p>
+                      <a:r>
+                        <a:rPr lang="en-US" dirty="0"/>
+                        <a:t>No</a:t>
+                      </a:r>
+                    </a:p>
+                  </a:txBody>
+                  <a:tcPr/>
+                </a:tc>
+                <a:tc>
+                  <a:txBody>
+                    <a:bodyPr/>
+                    <a:lstStyle/>
+                    <a:p>
+                      <a:r>
+                        <a:rPr lang="en-US" dirty="0"/>
+                        <a:t>Loop ended</a:t>
+                      </a:r>
+                    </a:p>
+                  </a:txBody>
+                  <a:tcPr/>
+                </a:tc>
+                <a:tc>
+                  <a:txBody>
+                    <a:bodyPr/>
+                    <a:lstStyle/>
+                    <a:p>
+                      <a:endParaRPr lang="en-US" dirty="0"/>
+                    </a:p>
+                  </a:txBody>
+                  <a:tcPr/>
+                </a:tc>
+                <a:extLst>
+                  <a:ext uri="{0D108BD9-81ED-4DB2-BD59-A6C34878D82A}">
+                    <a16:rowId xmlns:a16="http://schemas.microsoft.com/office/drawing/2014/main" val="2818860900"/>
+                  </a:ext>
+                </a:extLst>
+              </a:tr>
+            </a:tbl>
+          </a:graphicData>
+        </a:graphic>
+      </p:graphicFrame>
+    </p:spTree>
+    <p:extLst>
+      <p:ext uri="{BB962C8B-B14F-4D97-AF65-F5344CB8AC3E}">
+        <p14:creationId xmlns:p14="http://schemas.microsoft.com/office/powerpoint/2010/main" val="3796485302"/>
+      </p:ext>
+    </p:extLst>
+  </p:cSld>
+  <p:clrMapOvr>
+    <a:masterClrMapping/>
+  </p:clrMapOvr>
+</p:sld>
+</file>
+
+<file path=ppt/slides/slide8.xml><?xml version="1.0" encoding="utf-8"?>
+<p:sld xmlns:a="http://schemas.openxmlformats.org/drawingml/2006/main" xmlns:r="http://schemas.openxmlformats.org/officeDocument/2006/relationships" xmlns:p="http://schemas.openxmlformats.org/presentationml/2006/main">
+  <p:cSld>
+    <p:spTree>
+      <p:nvGrpSpPr>
+        <p:cNvPr id="1" name=""/>
+        <p:cNvGrpSpPr/>
+        <p:nvPr/>
+      </p:nvGrpSpPr>
+      <p:grpSpPr>
+        <a:xfrm>
+          <a:off x="0" y="0"/>
+          <a:ext cx="0" cy="0"/>
+          <a:chOff x="0" y="0"/>
+          <a:chExt cx="0" cy="0"/>
+        </a:xfrm>
+      </p:grpSpPr>
       <p:sp>
         <p:nvSpPr>
           <p:cNvPr id="2" name="Title 1">
@@ -6690,7 +9605,10 @@
             </a:r>
           </a:p>
           <a:p>
-            <a:endParaRPr lang="en-US" dirty="0"/>
+            <a:r>
+              <a:rPr lang="en-US" sz="2400" dirty="0"/>
+              <a:t>while loops check the condition at the beginning of the loop</a:t>
+            </a:r>
           </a:p>
         </p:txBody>
       </p:sp>
@@ -6698,6 +9616,96 @@
     <p:extLst>
       <p:ext uri="{BB962C8B-B14F-4D97-AF65-F5344CB8AC3E}">
         <p14:creationId xmlns:p14="http://schemas.microsoft.com/office/powerpoint/2010/main" val="908741316"/>
+      </p:ext>
+    </p:extLst>
+  </p:cSld>
+  <p:clrMapOvr>
+    <a:masterClrMapping/>
+  </p:clrMapOvr>
+</p:sld>
+</file>
+
+<file path=ppt/slides/slide9.xml><?xml version="1.0" encoding="utf-8"?>
+<p:sld xmlns:a="http://schemas.openxmlformats.org/drawingml/2006/main" xmlns:r="http://schemas.openxmlformats.org/officeDocument/2006/relationships" xmlns:p="http://schemas.openxmlformats.org/presentationml/2006/main">
+  <p:cSld>
+    <p:spTree>
+      <p:nvGrpSpPr>
+        <p:cNvPr id="1" name=""/>
+        <p:cNvGrpSpPr/>
+        <p:nvPr/>
+      </p:nvGrpSpPr>
+      <p:grpSpPr>
+        <a:xfrm>
+          <a:off x="0" y="0"/>
+          <a:ext cx="0" cy="0"/>
+          <a:chOff x="0" y="0"/>
+          <a:chExt cx="0" cy="0"/>
+        </a:xfrm>
+      </p:grpSpPr>
+      <p:pic>
+        <p:nvPicPr>
+          <p:cNvPr id="3" name="Picture 2">
+            <a:extLst>
+              <a:ext uri="{FF2B5EF4-FFF2-40B4-BE49-F238E27FC236}">
+                <a16:creationId xmlns:a16="http://schemas.microsoft.com/office/drawing/2014/main" id="{32A8035B-FC71-07A5-B5DD-8686C729AF18}"/>
+              </a:ext>
+            </a:extLst>
+          </p:cNvPr>
+          <p:cNvPicPr>
+            <a:picLocks noChangeAspect="1"/>
+          </p:cNvPicPr>
+          <p:nvPr/>
+        </p:nvPicPr>
+        <p:blipFill>
+          <a:blip r:embed="rId2"/>
+          <a:stretch>
+            <a:fillRect/>
+          </a:stretch>
+        </p:blipFill>
+        <p:spPr>
+          <a:xfrm>
+            <a:off x="1097670" y="2851150"/>
+            <a:ext cx="3568700" cy="1155700"/>
+          </a:xfrm>
+          <a:prstGeom prst="rect">
+            <a:avLst/>
+          </a:prstGeom>
+        </p:spPr>
+      </p:pic>
+      <p:pic>
+        <p:nvPicPr>
+          <p:cNvPr id="5" name="Picture 4">
+            <a:extLst>
+              <a:ext uri="{FF2B5EF4-FFF2-40B4-BE49-F238E27FC236}">
+                <a16:creationId xmlns:a16="http://schemas.microsoft.com/office/drawing/2014/main" id="{1E9611BA-6B4E-ADD1-B6C1-54F9A034820B}"/>
+              </a:ext>
+            </a:extLst>
+          </p:cNvPr>
+          <p:cNvPicPr>
+            <a:picLocks noChangeAspect="1"/>
+          </p:cNvPicPr>
+          <p:nvPr/>
+        </p:nvPicPr>
+        <p:blipFill>
+          <a:blip r:embed="rId3"/>
+          <a:stretch>
+            <a:fillRect/>
+          </a:stretch>
+        </p:blipFill>
+        <p:spPr>
+          <a:xfrm>
+            <a:off x="6577047" y="625821"/>
+            <a:ext cx="5183656" cy="5606358"/>
+          </a:xfrm>
+          <a:prstGeom prst="rect">
+            <a:avLst/>
+          </a:prstGeom>
+        </p:spPr>
+      </p:pic>
+    </p:spTree>
+    <p:extLst>
+      <p:ext uri="{BB962C8B-B14F-4D97-AF65-F5344CB8AC3E}">
+        <p14:creationId xmlns:p14="http://schemas.microsoft.com/office/powerpoint/2010/main" val="3420210233"/>
       </p:ext>
     </p:extLst>
   </p:cSld>
